--- a/apresentacao/JIC_2026_Lucas_Matias_Deepfake.pptx
+++ b/apresentacao/JIC_2026_Lucas_Matias_Deepfake.pptx
@@ -11,6 +11,9 @@
     <p:sldId id="268" r:id="rId16"/>
     <p:sldId id="269" r:id="rId17"/>
     <p:sldId id="270" r:id="rId18"/>
+    <p:sldId id="271" r:id="rId19"/>
+    <p:sldId id="272" r:id="rId20"/>
+    <p:sldId id="273" r:id="rId21"/>
     <p:sldId id="265" r:id="rId5"/>
   </p:sldIdLst>
   <p:sldSz cx="12192000" cy="6858000"/>
@@ -144,6 +147,1324 @@
     </p:ext>
   </p:extLst>
 </p:presentation>
+</file>
+
+<file path=ppt/charts/chart1.xml><?xml version="1.0" encoding="utf-8"?>
+<c:chartSpace xmlns:c="http://schemas.openxmlformats.org/drawingml/2006/chart" xmlns:a="http://schemas.openxmlformats.org/drawingml/2006/main" xmlns:r="http://schemas.openxmlformats.org/officeDocument/2006/relationships">
+  <c:chart>
+    <c:title>
+      <c:tx>
+        <c:rich>
+          <a:bodyPr/>
+          <a:lstStyle/>
+          <a:p>
+            <a:pPr algn="ctr">
+              <a:defRPr/>
+            </a:pPr>
+            <a:r>
+              <a:rPr sz="1400" b="1" i="0">
+                <a:solidFill>
+                  <a:srgbClr val="016F89"/>
+                </a:solidFill>
+                <a:latin typeface="Montserrat"/>
+                <a:ea typeface="Montserrat"/>
+                <a:cs typeface="Montserrat"/>
+              </a:rPr>
+              <a:t>Gênero</a:t>
+            </a:r>
+          </a:p>
+        </c:rich>
+      </c:tx>
+      <c:layout/>
+      <c:overlay val="0"/>
+    </c:title>
+    <c:autoTitleDeleted val="0"/>
+    <c:plotArea>
+      <c:pieChart>
+        <c:varyColors val="1"/>
+        <c:ser>
+          <c:idx val="0"/>
+          <c:order val="0"/>
+          <c:tx>
+            <c:strRef>
+              <c:f>Sheet1!$B$1</c:f>
+              <c:strCache>
+                <c:ptCount val="1"/>
+                <c:pt idx="0">
+                  <c:v>Gênero</c:v>
+                </c:pt>
+              </c:strCache>
+            </c:strRef>
+          </c:tx>
+          <c:dPt>
+            <c:idx val="0"/>
+            <c:spPr>
+              <a:solidFill>
+                <a:srgbClr val="016F89"/>
+              </a:solidFill>
+              <a:ln>
+                <a:noFill/>
+              </a:ln>
+            </c:spPr>
+          </c:dPt>
+          <c:dPt>
+            <c:idx val="1"/>
+            <c:spPr>
+              <a:solidFill>
+                <a:srgbClr val="00C2CB"/>
+              </a:solidFill>
+              <a:ln>
+                <a:noFill/>
+              </a:ln>
+            </c:spPr>
+          </c:dPt>
+          <c:dPt>
+            <c:idx val="2"/>
+            <c:spPr>
+              <a:solidFill>
+                <a:srgbClr val="7DD3FC"/>
+              </a:solidFill>
+              <a:ln>
+                <a:noFill/>
+              </a:ln>
+            </c:spPr>
+          </c:dPt>
+          <c:cat>
+            <c:strRef>
+              <c:f>Sheet1!$A$2:$A$4</c:f>
+              <c:strCache>
+                <c:ptCount val="3"/>
+                <c:pt idx="0">
+                  <c:v>Feminino  70,4%</c:v>
+                </c:pt>
+                <c:pt idx="1">
+                  <c:v>Masculino  26,8%</c:v>
+                </c:pt>
+                <c:pt idx="2">
+                  <c:v>Não binário  2,8%</c:v>
+                </c:pt>
+              </c:strCache>
+            </c:strRef>
+          </c:cat>
+          <c:val>
+            <c:numRef>
+              <c:f>Sheet1!$B$2:$B$4</c:f>
+              <c:numCache>
+                <c:formatCode>General</c:formatCode>
+                <c:ptCount val="3"/>
+                <c:pt idx="0">
+                  <c:v>50</c:v>
+                </c:pt>
+                <c:pt idx="1">
+                  <c:v>19</c:v>
+                </c:pt>
+                <c:pt idx="2">
+                  <c:v>2</c:v>
+                </c:pt>
+              </c:numCache>
+            </c:numRef>
+          </c:val>
+        </c:ser>
+      </c:pieChart>
+    </c:plotArea>
+    <c:legend>
+      <c:legendPos val="b"/>
+      <c:overlay val="0"/>
+      <c:txPr>
+        <a:bodyPr/>
+        <a:lstStyle/>
+        <a:p>
+          <a:pPr>
+            <a:defRPr sz="1100">
+              <a:solidFill>
+                <a:srgbClr val="1E293B"/>
+              </a:solidFill>
+              <a:latin typeface="Open Sans"/>
+            </a:defRPr>
+          </a:pPr>
+        </a:p>
+      </c:txPr>
+    </c:legend>
+    <c:dispBlanksAs val="gap"/>
+  </c:chart>
+  <c:txPr>
+    <a:bodyPr/>
+    <a:lstStyle/>
+    <a:p>
+      <a:pPr>
+        <a:defRPr sz="1800"/>
+      </a:pPr>
+      <a:endParaRPr lang="en-US"/>
+    </a:p>
+  </c:txPr>
+  <c:externalData r:id="rId1">
+    <c:autoUpdate val="0"/>
+  </c:externalData>
+</c:chartSpace>
+</file>
+
+<file path=ppt/charts/chart2.xml><?xml version="1.0" encoding="utf-8"?>
+<c:chartSpace xmlns:c="http://schemas.openxmlformats.org/drawingml/2006/chart" xmlns:a="http://schemas.openxmlformats.org/drawingml/2006/main" xmlns:r="http://schemas.openxmlformats.org/officeDocument/2006/relationships">
+  <c:chart>
+    <c:title>
+      <c:tx>
+        <c:rich>
+          <a:bodyPr/>
+          <a:lstStyle/>
+          <a:p>
+            <a:pPr algn="ctr">
+              <a:defRPr/>
+            </a:pPr>
+            <a:r>
+              <a:rPr sz="1400" b="1" i="0">
+                <a:solidFill>
+                  <a:srgbClr val="016F89"/>
+                </a:solidFill>
+                <a:latin typeface="Montserrat"/>
+                <a:ea typeface="Montserrat"/>
+                <a:cs typeface="Montserrat"/>
+              </a:rPr>
+              <a:t>Faixa etária</a:t>
+            </a:r>
+          </a:p>
+        </c:rich>
+      </c:tx>
+      <c:layout/>
+      <c:overlay val="0"/>
+    </c:title>
+    <c:autoTitleDeleted val="0"/>
+    <c:plotArea>
+      <c:pieChart>
+        <c:varyColors val="1"/>
+        <c:ser>
+          <c:idx val="0"/>
+          <c:order val="0"/>
+          <c:tx>
+            <c:strRef>
+              <c:f>Sheet1!$B$1</c:f>
+              <c:strCache>
+                <c:ptCount val="1"/>
+                <c:pt idx="0">
+                  <c:v>Faixa etária</c:v>
+                </c:pt>
+              </c:strCache>
+            </c:strRef>
+          </c:tx>
+          <c:dPt>
+            <c:idx val="0"/>
+            <c:spPr>
+              <a:solidFill>
+                <a:srgbClr val="016F89"/>
+              </a:solidFill>
+              <a:ln>
+                <a:noFill/>
+              </a:ln>
+            </c:spPr>
+          </c:dPt>
+          <c:dPt>
+            <c:idx val="1"/>
+            <c:spPr>
+              <a:solidFill>
+                <a:srgbClr val="00C2CB"/>
+              </a:solidFill>
+              <a:ln>
+                <a:noFill/>
+              </a:ln>
+            </c:spPr>
+          </c:dPt>
+          <c:dPt>
+            <c:idx val="2"/>
+            <c:spPr>
+              <a:solidFill>
+                <a:srgbClr val="7DD3FC"/>
+              </a:solidFill>
+              <a:ln>
+                <a:noFill/>
+              </a:ln>
+            </c:spPr>
+          </c:dPt>
+          <c:dPt>
+            <c:idx val="3"/>
+            <c:spPr>
+              <a:solidFill>
+                <a:srgbClr val="94A3B8"/>
+              </a:solidFill>
+              <a:ln>
+                <a:noFill/>
+              </a:ln>
+            </c:spPr>
+          </c:dPt>
+          <c:cat>
+            <c:strRef>
+              <c:f>Sheet1!$A$2:$A$5</c:f>
+              <c:strCache>
+                <c:ptCount val="4"/>
+                <c:pt idx="0">
+                  <c:v>18–24 anos  52,1%</c:v>
+                </c:pt>
+                <c:pt idx="1">
+                  <c:v>30 anos ou mais  35,2%</c:v>
+                </c:pt>
+                <c:pt idx="2">
+                  <c:v>13–17 anos  7,0%</c:v>
+                </c:pt>
+                <c:pt idx="3">
+                  <c:v>25–29 anos  5,6%</c:v>
+                </c:pt>
+              </c:strCache>
+            </c:strRef>
+          </c:cat>
+          <c:val>
+            <c:numRef>
+              <c:f>Sheet1!$B$2:$B$5</c:f>
+              <c:numCache>
+                <c:formatCode>General</c:formatCode>
+                <c:ptCount val="4"/>
+                <c:pt idx="0">
+                  <c:v>37</c:v>
+                </c:pt>
+                <c:pt idx="1">
+                  <c:v>25</c:v>
+                </c:pt>
+                <c:pt idx="2">
+                  <c:v>5</c:v>
+                </c:pt>
+                <c:pt idx="3">
+                  <c:v>4</c:v>
+                </c:pt>
+              </c:numCache>
+            </c:numRef>
+          </c:val>
+        </c:ser>
+      </c:pieChart>
+    </c:plotArea>
+    <c:legend>
+      <c:legendPos val="b"/>
+      <c:overlay val="0"/>
+      <c:txPr>
+        <a:bodyPr/>
+        <a:lstStyle/>
+        <a:p>
+          <a:pPr>
+            <a:defRPr sz="1100">
+              <a:solidFill>
+                <a:srgbClr val="1E293B"/>
+              </a:solidFill>
+              <a:latin typeface="Open Sans"/>
+            </a:defRPr>
+          </a:pPr>
+        </a:p>
+      </c:txPr>
+    </c:legend>
+    <c:dispBlanksAs val="gap"/>
+  </c:chart>
+  <c:txPr>
+    <a:bodyPr/>
+    <a:lstStyle/>
+    <a:p>
+      <a:pPr>
+        <a:defRPr sz="1800"/>
+      </a:pPr>
+      <a:endParaRPr lang="en-US"/>
+    </a:p>
+  </c:txPr>
+  <c:externalData r:id="rId1">
+    <c:autoUpdate val="0"/>
+  </c:externalData>
+</c:chartSpace>
+</file>
+
+<file path=ppt/charts/chart3.xml><?xml version="1.0" encoding="utf-8"?>
+<c:chartSpace xmlns:c="http://schemas.openxmlformats.org/drawingml/2006/chart" xmlns:a="http://schemas.openxmlformats.org/drawingml/2006/main" xmlns:r="http://schemas.openxmlformats.org/officeDocument/2006/relationships">
+  <c:chart>
+    <c:title>
+      <c:tx>
+        <c:rich>
+          <a:bodyPr/>
+          <a:lstStyle/>
+          <a:p>
+            <a:pPr algn="ctr">
+              <a:defRPr/>
+            </a:pPr>
+            <a:r>
+              <a:rPr sz="1400" b="1" i="0">
+                <a:solidFill>
+                  <a:srgbClr val="016F89"/>
+                </a:solidFill>
+                <a:latin typeface="Montserrat"/>
+                <a:ea typeface="Montserrat"/>
+                <a:cs typeface="Montserrat"/>
+              </a:rPr>
+              <a:t>Termo IA</a:t>
+            </a:r>
+          </a:p>
+        </c:rich>
+      </c:tx>
+      <c:layout/>
+      <c:overlay val="0"/>
+    </c:title>
+    <c:autoTitleDeleted val="0"/>
+    <c:plotArea>
+      <c:pieChart>
+        <c:varyColors val="1"/>
+        <c:ser>
+          <c:idx val="0"/>
+          <c:order val="0"/>
+          <c:tx>
+            <c:strRef>
+              <c:f>Sheet1!$B$1</c:f>
+              <c:strCache>
+                <c:ptCount val="1"/>
+                <c:pt idx="0">
+                  <c:v>Termo IA</c:v>
+                </c:pt>
+              </c:strCache>
+            </c:strRef>
+          </c:tx>
+          <c:dPt>
+            <c:idx val="0"/>
+            <c:spPr>
+              <a:solidFill>
+                <a:srgbClr val="016F89"/>
+              </a:solidFill>
+              <a:ln>
+                <a:noFill/>
+              </a:ln>
+            </c:spPr>
+          </c:dPt>
+          <c:dPt>
+            <c:idx val="1"/>
+            <c:spPr>
+              <a:solidFill>
+                <a:srgbClr val="7DD3FC"/>
+              </a:solidFill>
+              <a:ln>
+                <a:noFill/>
+              </a:ln>
+            </c:spPr>
+          </c:dPt>
+          <c:cat>
+            <c:strRef>
+              <c:f>Sheet1!$A$2:$A$3</c:f>
+              <c:strCache>
+                <c:ptCount val="2"/>
+                <c:pt idx="0">
+                  <c:v>Conhece  76,1%</c:v>
+                </c:pt>
+                <c:pt idx="1">
+                  <c:v>Não conhece  23,9%</c:v>
+                </c:pt>
+              </c:strCache>
+            </c:strRef>
+          </c:cat>
+          <c:val>
+            <c:numRef>
+              <c:f>Sheet1!$B$2:$B$3</c:f>
+              <c:numCache>
+                <c:formatCode>General</c:formatCode>
+                <c:ptCount val="2"/>
+                <c:pt idx="0">
+                  <c:v>54</c:v>
+                </c:pt>
+                <c:pt idx="1">
+                  <c:v>17</c:v>
+                </c:pt>
+              </c:numCache>
+            </c:numRef>
+          </c:val>
+        </c:ser>
+      </c:pieChart>
+    </c:plotArea>
+    <c:legend>
+      <c:legendPos val="b"/>
+      <c:overlay val="0"/>
+      <c:txPr>
+        <a:bodyPr/>
+        <a:lstStyle/>
+        <a:p>
+          <a:pPr>
+            <a:defRPr sz="1100">
+              <a:solidFill>
+                <a:srgbClr val="1E293B"/>
+              </a:solidFill>
+              <a:latin typeface="Open Sans"/>
+            </a:defRPr>
+          </a:pPr>
+        </a:p>
+      </c:txPr>
+    </c:legend>
+    <c:dispBlanksAs val="gap"/>
+  </c:chart>
+  <c:txPr>
+    <a:bodyPr/>
+    <a:lstStyle/>
+    <a:p>
+      <a:pPr>
+        <a:defRPr sz="1800"/>
+      </a:pPr>
+      <a:endParaRPr lang="en-US"/>
+    </a:p>
+  </c:txPr>
+  <c:externalData r:id="rId1">
+    <c:autoUpdate val="0"/>
+  </c:externalData>
+</c:chartSpace>
+</file>
+
+<file path=ppt/charts/chart4.xml><?xml version="1.0" encoding="utf-8"?>
+<c:chartSpace xmlns:c="http://schemas.openxmlformats.org/drawingml/2006/chart" xmlns:a="http://schemas.openxmlformats.org/drawingml/2006/main" xmlns:r="http://schemas.openxmlformats.org/officeDocument/2006/relationships">
+  <c:chart>
+    <c:title>
+      <c:tx>
+        <c:rich>
+          <a:bodyPr/>
+          <a:lstStyle/>
+          <a:p>
+            <a:pPr algn="ctr">
+              <a:defRPr/>
+            </a:pPr>
+            <a:r>
+              <a:rPr sz="1400" b="1" i="0">
+                <a:solidFill>
+                  <a:srgbClr val="016F89"/>
+                </a:solidFill>
+                <a:latin typeface="Montserrat"/>
+                <a:ea typeface="Montserrat"/>
+                <a:cs typeface="Montserrat"/>
+              </a:rPr>
+              <a:t>Termo deepfake</a:t>
+            </a:r>
+          </a:p>
+        </c:rich>
+      </c:tx>
+      <c:layout/>
+      <c:overlay val="0"/>
+    </c:title>
+    <c:autoTitleDeleted val="0"/>
+    <c:plotArea>
+      <c:pieChart>
+        <c:varyColors val="1"/>
+        <c:ser>
+          <c:idx val="0"/>
+          <c:order val="0"/>
+          <c:tx>
+            <c:strRef>
+              <c:f>Sheet1!$B$1</c:f>
+              <c:strCache>
+                <c:ptCount val="1"/>
+                <c:pt idx="0">
+                  <c:v>Termo deepfake</c:v>
+                </c:pt>
+              </c:strCache>
+            </c:strRef>
+          </c:tx>
+          <c:dPt>
+            <c:idx val="0"/>
+            <c:spPr>
+              <a:solidFill>
+                <a:srgbClr val="016F89"/>
+              </a:solidFill>
+              <a:ln>
+                <a:noFill/>
+              </a:ln>
+            </c:spPr>
+          </c:dPt>
+          <c:dPt>
+            <c:idx val="1"/>
+            <c:spPr>
+              <a:solidFill>
+                <a:srgbClr val="7DD3FC"/>
+              </a:solidFill>
+              <a:ln>
+                <a:noFill/>
+              </a:ln>
+            </c:spPr>
+          </c:dPt>
+          <c:cat>
+            <c:strRef>
+              <c:f>Sheet1!$A$2:$A$3</c:f>
+              <c:strCache>
+                <c:ptCount val="2"/>
+                <c:pt idx="0">
+                  <c:v>Conhece  81,7%</c:v>
+                </c:pt>
+                <c:pt idx="1">
+                  <c:v>Não conhece  18,3%</c:v>
+                </c:pt>
+              </c:strCache>
+            </c:strRef>
+          </c:cat>
+          <c:val>
+            <c:numRef>
+              <c:f>Sheet1!$B$2:$B$3</c:f>
+              <c:numCache>
+                <c:formatCode>General</c:formatCode>
+                <c:ptCount val="2"/>
+                <c:pt idx="0">
+                  <c:v>58</c:v>
+                </c:pt>
+                <c:pt idx="1">
+                  <c:v>13</c:v>
+                </c:pt>
+              </c:numCache>
+            </c:numRef>
+          </c:val>
+        </c:ser>
+      </c:pieChart>
+    </c:plotArea>
+    <c:legend>
+      <c:legendPos val="b"/>
+      <c:overlay val="0"/>
+      <c:txPr>
+        <a:bodyPr/>
+        <a:lstStyle/>
+        <a:p>
+          <a:pPr>
+            <a:defRPr sz="1100">
+              <a:solidFill>
+                <a:srgbClr val="1E293B"/>
+              </a:solidFill>
+              <a:latin typeface="Open Sans"/>
+            </a:defRPr>
+          </a:pPr>
+        </a:p>
+      </c:txPr>
+    </c:legend>
+    <c:dispBlanksAs val="gap"/>
+  </c:chart>
+  <c:txPr>
+    <a:bodyPr/>
+    <a:lstStyle/>
+    <a:p>
+      <a:pPr>
+        <a:defRPr sz="1800"/>
+      </a:pPr>
+      <a:endParaRPr lang="en-US"/>
+    </a:p>
+  </c:txPr>
+  <c:externalData r:id="rId1">
+    <c:autoUpdate val="0"/>
+  </c:externalData>
+</c:chartSpace>
+</file>
+
+<file path=ppt/charts/chart5.xml><?xml version="1.0" encoding="utf-8"?>
+<c:chartSpace xmlns:c="http://schemas.openxmlformats.org/drawingml/2006/chart" xmlns:a="http://schemas.openxmlformats.org/drawingml/2006/main" xmlns:r="http://schemas.openxmlformats.org/officeDocument/2006/relationships">
+  <c:chart>
+    <c:title>
+      <c:tx>
+        <c:rich>
+          <a:bodyPr/>
+          <a:lstStyle/>
+          <a:p>
+            <a:pPr algn="ctr">
+              <a:defRPr/>
+            </a:pPr>
+            <a:r>
+              <a:rPr sz="1400" b="1" i="0">
+                <a:solidFill>
+                  <a:srgbClr val="016F89"/>
+                </a:solidFill>
+                <a:latin typeface="Montserrat"/>
+                <a:ea typeface="Montserrat"/>
+                <a:cs typeface="Montserrat"/>
+              </a:rPr>
+              <a:t>Ferramenta de detecção</a:t>
+            </a:r>
+          </a:p>
+        </c:rich>
+      </c:tx>
+      <c:layout/>
+      <c:overlay val="0"/>
+    </c:title>
+    <c:autoTitleDeleted val="0"/>
+    <c:plotArea>
+      <c:pieChart>
+        <c:varyColors val="1"/>
+        <c:ser>
+          <c:idx val="0"/>
+          <c:order val="0"/>
+          <c:tx>
+            <c:strRef>
+              <c:f>Sheet1!$B$1</c:f>
+              <c:strCache>
+                <c:ptCount val="1"/>
+                <c:pt idx="0">
+                  <c:v>Ferramenta de detecção</c:v>
+                </c:pt>
+              </c:strCache>
+            </c:strRef>
+          </c:tx>
+          <c:dPt>
+            <c:idx val="0"/>
+            <c:spPr>
+              <a:solidFill>
+                <a:srgbClr val="016F89"/>
+              </a:solidFill>
+              <a:ln>
+                <a:noFill/>
+              </a:ln>
+            </c:spPr>
+          </c:dPt>
+          <c:dPt>
+            <c:idx val="1"/>
+            <c:spPr>
+              <a:solidFill>
+                <a:srgbClr val="00C2CB"/>
+              </a:solidFill>
+              <a:ln>
+                <a:noFill/>
+              </a:ln>
+            </c:spPr>
+          </c:dPt>
+          <c:cat>
+            <c:strRef>
+              <c:f>Sheet1!$A$2:$A$3</c:f>
+              <c:strCache>
+                <c:ptCount val="2"/>
+                <c:pt idx="0">
+                  <c:v>Não conhece  57,7%</c:v>
+                </c:pt>
+                <c:pt idx="1">
+                  <c:v>Conhece  42,3%</c:v>
+                </c:pt>
+              </c:strCache>
+            </c:strRef>
+          </c:cat>
+          <c:val>
+            <c:numRef>
+              <c:f>Sheet1!$B$2:$B$3</c:f>
+              <c:numCache>
+                <c:formatCode>General</c:formatCode>
+                <c:ptCount val="2"/>
+                <c:pt idx="0">
+                  <c:v>41</c:v>
+                </c:pt>
+                <c:pt idx="1">
+                  <c:v>30</c:v>
+                </c:pt>
+              </c:numCache>
+            </c:numRef>
+          </c:val>
+        </c:ser>
+      </c:pieChart>
+    </c:plotArea>
+    <c:legend>
+      <c:legendPos val="b"/>
+      <c:overlay val="0"/>
+      <c:txPr>
+        <a:bodyPr/>
+        <a:lstStyle/>
+        <a:p>
+          <a:pPr>
+            <a:defRPr sz="1100">
+              <a:solidFill>
+                <a:srgbClr val="1E293B"/>
+              </a:solidFill>
+              <a:latin typeface="Open Sans"/>
+            </a:defRPr>
+          </a:pPr>
+        </a:p>
+      </c:txPr>
+    </c:legend>
+    <c:dispBlanksAs val="gap"/>
+  </c:chart>
+  <c:txPr>
+    <a:bodyPr/>
+    <a:lstStyle/>
+    <a:p>
+      <a:pPr>
+        <a:defRPr sz="1800"/>
+      </a:pPr>
+      <a:endParaRPr lang="en-US"/>
+    </a:p>
+  </c:txPr>
+  <c:externalData r:id="rId1">
+    <c:autoUpdate val="0"/>
+  </c:externalData>
+</c:chartSpace>
+</file>
+
+<file path=ppt/charts/chart6.xml><?xml version="1.0" encoding="utf-8"?>
+<c:chartSpace xmlns:c="http://schemas.openxmlformats.org/drawingml/2006/chart" xmlns:a="http://schemas.openxmlformats.org/drawingml/2006/main" xmlns:r="http://schemas.openxmlformats.org/officeDocument/2006/relationships">
+  <c:chart>
+    <c:title>
+      <c:tx>
+        <c:rich>
+          <a:bodyPr/>
+          <a:lstStyle/>
+          <a:p>
+            <a:pPr algn="ctr">
+              <a:defRPr/>
+            </a:pPr>
+            <a:r>
+              <a:rPr sz="1400" b="1" i="0">
+                <a:solidFill>
+                  <a:srgbClr val="016F89"/>
+                </a:solidFill>
+                <a:latin typeface="Montserrat"/>
+                <a:ea typeface="Montserrat"/>
+                <a:cs typeface="Montserrat"/>
+              </a:rPr>
+              <a:t>Exposição</a:t>
+            </a:r>
+          </a:p>
+        </c:rich>
+      </c:tx>
+      <c:layout/>
+      <c:overlay val="0"/>
+    </c:title>
+    <c:autoTitleDeleted val="0"/>
+    <c:plotArea>
+      <c:pieChart>
+        <c:varyColors val="1"/>
+        <c:ser>
+          <c:idx val="0"/>
+          <c:order val="0"/>
+          <c:tx>
+            <c:strRef>
+              <c:f>Sheet1!$B$1</c:f>
+              <c:strCache>
+                <c:ptCount val="1"/>
+                <c:pt idx="0">
+                  <c:v>Exposição</c:v>
+                </c:pt>
+              </c:strCache>
+            </c:strRef>
+          </c:tx>
+          <c:dPt>
+            <c:idx val="0"/>
+            <c:spPr>
+              <a:solidFill>
+                <a:srgbClr val="016F89"/>
+              </a:solidFill>
+              <a:ln>
+                <a:noFill/>
+              </a:ln>
+            </c:spPr>
+          </c:dPt>
+          <c:dPt>
+            <c:idx val="1"/>
+            <c:spPr>
+              <a:solidFill>
+                <a:srgbClr val="7DD3FC"/>
+              </a:solidFill>
+              <a:ln>
+                <a:noFill/>
+              </a:ln>
+            </c:spPr>
+          </c:dPt>
+          <c:cat>
+            <c:strRef>
+              <c:f>Sheet1!$A$2:$A$3</c:f>
+              <c:strCache>
+                <c:ptCount val="2"/>
+                <c:pt idx="0">
+                  <c:v>Sofreu ou conhece vítima  40,8%</c:v>
+                </c:pt>
+                <c:pt idx="1">
+                  <c:v>Não  59,2%</c:v>
+                </c:pt>
+              </c:strCache>
+            </c:strRef>
+          </c:cat>
+          <c:val>
+            <c:numRef>
+              <c:f>Sheet1!$B$2:$B$3</c:f>
+              <c:numCache>
+                <c:formatCode>General</c:formatCode>
+                <c:ptCount val="2"/>
+                <c:pt idx="0">
+                  <c:v>29</c:v>
+                </c:pt>
+                <c:pt idx="1">
+                  <c:v>42</c:v>
+                </c:pt>
+              </c:numCache>
+            </c:numRef>
+          </c:val>
+        </c:ser>
+      </c:pieChart>
+    </c:plotArea>
+    <c:legend>
+      <c:legendPos val="b"/>
+      <c:overlay val="0"/>
+      <c:txPr>
+        <a:bodyPr/>
+        <a:lstStyle/>
+        <a:p>
+          <a:pPr>
+            <a:defRPr sz="1100">
+              <a:solidFill>
+                <a:srgbClr val="1E293B"/>
+              </a:solidFill>
+              <a:latin typeface="Open Sans"/>
+            </a:defRPr>
+          </a:pPr>
+        </a:p>
+      </c:txPr>
+    </c:legend>
+    <c:dispBlanksAs val="gap"/>
+  </c:chart>
+  <c:txPr>
+    <a:bodyPr/>
+    <a:lstStyle/>
+    <a:p>
+      <a:pPr>
+        <a:defRPr sz="1800"/>
+      </a:pPr>
+      <a:endParaRPr lang="en-US"/>
+    </a:p>
+  </c:txPr>
+  <c:externalData r:id="rId1">
+    <c:autoUpdate val="0"/>
+  </c:externalData>
+</c:chartSpace>
+</file>
+
+<file path=ppt/charts/chart7.xml><?xml version="1.0" encoding="utf-8"?>
+<c:chartSpace xmlns:c="http://schemas.openxmlformats.org/drawingml/2006/chart" xmlns:a="http://schemas.openxmlformats.org/drawingml/2006/main" xmlns:r="http://schemas.openxmlformats.org/officeDocument/2006/relationships">
+  <c:chart>
+    <c:title>
+      <c:tx>
+        <c:rich>
+          <a:bodyPr/>
+          <a:lstStyle/>
+          <a:p>
+            <a:pPr algn="ctr">
+              <a:defRPr/>
+            </a:pPr>
+            <a:r>
+              <a:rPr sz="1400" b="1" i="0">
+                <a:solidFill>
+                  <a:srgbClr val="016F89"/>
+                </a:solidFill>
+                <a:latin typeface="Montserrat"/>
+                <a:ea typeface="Montserrat"/>
+                <a:cs typeface="Montserrat"/>
+              </a:rPr>
+              <a:t>Reação nesses casos</a:t>
+            </a:r>
+          </a:p>
+        </c:rich>
+      </c:tx>
+      <c:layout/>
+      <c:overlay val="0"/>
+    </c:title>
+    <c:autoTitleDeleted val="0"/>
+    <c:plotArea>
+      <c:pieChart>
+        <c:varyColors val="1"/>
+        <c:ser>
+          <c:idx val="0"/>
+          <c:order val="0"/>
+          <c:tx>
+            <c:strRef>
+              <c:f>Sheet1!$B$1</c:f>
+              <c:strCache>
+                <c:ptCount val="1"/>
+                <c:pt idx="0">
+                  <c:v>Reação nesses casos</c:v>
+                </c:pt>
+              </c:strCache>
+            </c:strRef>
+          </c:tx>
+          <c:dPt>
+            <c:idx val="0"/>
+            <c:spPr>
+              <a:solidFill>
+                <a:srgbClr val="016F89"/>
+              </a:solidFill>
+              <a:ln>
+                <a:noFill/>
+              </a:ln>
+            </c:spPr>
+          </c:dPt>
+          <c:dPt>
+            <c:idx val="1"/>
+            <c:spPr>
+              <a:solidFill>
+                <a:srgbClr val="00C2CB"/>
+              </a:solidFill>
+              <a:ln>
+                <a:noFill/>
+              </a:ln>
+            </c:spPr>
+          </c:dPt>
+          <c:dPt>
+            <c:idx val="2"/>
+            <c:spPr>
+              <a:solidFill>
+                <a:srgbClr val="7DD3FC"/>
+              </a:solidFill>
+              <a:ln>
+                <a:noFill/>
+              </a:ln>
+            </c:spPr>
+          </c:dPt>
+          <c:dPt>
+            <c:idx val="3"/>
+            <c:spPr>
+              <a:solidFill>
+                <a:srgbClr val="94A3B8"/>
+              </a:solidFill>
+              <a:ln>
+                <a:noFill/>
+              </a:ln>
+            </c:spPr>
+          </c:dPt>
+          <c:cat>
+            <c:strRef>
+              <c:f>Sheet1!$A$2:$A$5</c:f>
+              <c:strCache>
+                <c:ptCount val="4"/>
+                <c:pt idx="0">
+                  <c:v>Silêncio  37,9%</c:v>
+                </c:pt>
+                <c:pt idx="1">
+                  <c:v>Não se sabe  27,6%</c:v>
+                </c:pt>
+                <c:pt idx="2">
+                  <c:v>Denúncia à polícia  24,1%</c:v>
+                </c:pt>
+                <c:pt idx="3">
+                  <c:v>Adulto de confiança  10,3%</c:v>
+                </c:pt>
+              </c:strCache>
+            </c:strRef>
+          </c:cat>
+          <c:val>
+            <c:numRef>
+              <c:f>Sheet1!$B$2:$B$5</c:f>
+              <c:numCache>
+                <c:formatCode>General</c:formatCode>
+                <c:ptCount val="4"/>
+                <c:pt idx="0">
+                  <c:v>11</c:v>
+                </c:pt>
+                <c:pt idx="1">
+                  <c:v>8</c:v>
+                </c:pt>
+                <c:pt idx="2">
+                  <c:v>7</c:v>
+                </c:pt>
+                <c:pt idx="3">
+                  <c:v>3</c:v>
+                </c:pt>
+              </c:numCache>
+            </c:numRef>
+          </c:val>
+        </c:ser>
+      </c:pieChart>
+    </c:plotArea>
+    <c:legend>
+      <c:legendPos val="b"/>
+      <c:overlay val="0"/>
+      <c:txPr>
+        <a:bodyPr/>
+        <a:lstStyle/>
+        <a:p>
+          <a:pPr>
+            <a:defRPr sz="1100">
+              <a:solidFill>
+                <a:srgbClr val="1E293B"/>
+              </a:solidFill>
+              <a:latin typeface="Open Sans"/>
+            </a:defRPr>
+          </a:pPr>
+        </a:p>
+      </c:txPr>
+    </c:legend>
+    <c:dispBlanksAs val="gap"/>
+  </c:chart>
+  <c:txPr>
+    <a:bodyPr/>
+    <a:lstStyle/>
+    <a:p>
+      <a:pPr>
+        <a:defRPr sz="1800"/>
+      </a:pPr>
+      <a:endParaRPr lang="en-US"/>
+    </a:p>
+  </c:txPr>
+  <c:externalData r:id="rId1">
+    <c:autoUpdate val="0"/>
+  </c:externalData>
+</c:chartSpace>
+</file>
+
+<file path=ppt/charts/chart8.xml><?xml version="1.0" encoding="utf-8"?>
+<c:chartSpace xmlns:c="http://schemas.openxmlformats.org/drawingml/2006/chart" xmlns:a="http://schemas.openxmlformats.org/drawingml/2006/main" xmlns:r="http://schemas.openxmlformats.org/officeDocument/2006/relationships">
+  <c:chart>
+    <c:title>
+      <c:tx>
+        <c:rich>
+          <a:bodyPr/>
+          <a:lstStyle/>
+          <a:p>
+            <a:pPr algn="ctr">
+              <a:defRPr/>
+            </a:pPr>
+            <a:r>
+              <a:rPr sz="1400" b="1" i="0">
+                <a:solidFill>
+                  <a:srgbClr val="016F89"/>
+                </a:solidFill>
+                <a:latin typeface="Montserrat"/>
+                <a:ea typeface="Montserrat"/>
+                <a:cs typeface="Montserrat"/>
+              </a:rPr>
+              <a:t>Mulheres  ·  17 de 50</a:t>
+            </a:r>
+          </a:p>
+        </c:rich>
+      </c:tx>
+      <c:layout/>
+      <c:overlay val="0"/>
+    </c:title>
+    <c:autoTitleDeleted val="0"/>
+    <c:plotArea>
+      <c:pieChart>
+        <c:varyColors val="1"/>
+        <c:ser>
+          <c:idx val="0"/>
+          <c:order val="0"/>
+          <c:tx>
+            <c:strRef>
+              <c:f>Sheet1!$B$1</c:f>
+              <c:strCache>
+                <c:ptCount val="1"/>
+                <c:pt idx="0">
+                  <c:v>Mulheres  ·  17 de 50</c:v>
+                </c:pt>
+              </c:strCache>
+            </c:strRef>
+          </c:tx>
+          <c:dPt>
+            <c:idx val="0"/>
+            <c:spPr>
+              <a:solidFill>
+                <a:srgbClr val="016F89"/>
+              </a:solidFill>
+              <a:ln>
+                <a:noFill/>
+              </a:ln>
+            </c:spPr>
+          </c:dPt>
+          <c:dPt>
+            <c:idx val="1"/>
+            <c:spPr>
+              <a:solidFill>
+                <a:srgbClr val="00C2CB"/>
+              </a:solidFill>
+              <a:ln>
+                <a:noFill/>
+              </a:ln>
+            </c:spPr>
+          </c:dPt>
+          <c:cat>
+            <c:strRef>
+              <c:f>Sheet1!$A$2:$A$3</c:f>
+              <c:strCache>
+                <c:ptCount val="2"/>
+                <c:pt idx="0">
+                  <c:v>Não conhece  66,0%</c:v>
+                </c:pt>
+                <c:pt idx="1">
+                  <c:v>Conhece  34,0%</c:v>
+                </c:pt>
+              </c:strCache>
+            </c:strRef>
+          </c:cat>
+          <c:val>
+            <c:numRef>
+              <c:f>Sheet1!$B$2:$B$3</c:f>
+              <c:numCache>
+                <c:formatCode>General</c:formatCode>
+                <c:ptCount val="2"/>
+                <c:pt idx="0">
+                  <c:v>33</c:v>
+                </c:pt>
+                <c:pt idx="1">
+                  <c:v>17</c:v>
+                </c:pt>
+              </c:numCache>
+            </c:numRef>
+          </c:val>
+        </c:ser>
+      </c:pieChart>
+    </c:plotArea>
+    <c:legend>
+      <c:legendPos val="b"/>
+      <c:overlay val="0"/>
+      <c:txPr>
+        <a:bodyPr/>
+        <a:lstStyle/>
+        <a:p>
+          <a:pPr>
+            <a:defRPr sz="1100">
+              <a:solidFill>
+                <a:srgbClr val="1E293B"/>
+              </a:solidFill>
+              <a:latin typeface="Open Sans"/>
+            </a:defRPr>
+          </a:pPr>
+        </a:p>
+      </c:txPr>
+    </c:legend>
+    <c:dispBlanksAs val="gap"/>
+  </c:chart>
+  <c:txPr>
+    <a:bodyPr/>
+    <a:lstStyle/>
+    <a:p>
+      <a:pPr>
+        <a:defRPr sz="1800"/>
+      </a:pPr>
+      <a:endParaRPr lang="en-US"/>
+    </a:p>
+  </c:txPr>
+  <c:externalData r:id="rId1">
+    <c:autoUpdate val="0"/>
+  </c:externalData>
+</c:chartSpace>
+</file>
+
+<file path=ppt/charts/chart9.xml><?xml version="1.0" encoding="utf-8"?>
+<c:chartSpace xmlns:c="http://schemas.openxmlformats.org/drawingml/2006/chart" xmlns:a="http://schemas.openxmlformats.org/drawingml/2006/main" xmlns:r="http://schemas.openxmlformats.org/officeDocument/2006/relationships">
+  <c:chart>
+    <c:title>
+      <c:tx>
+        <c:rich>
+          <a:bodyPr/>
+          <a:lstStyle/>
+          <a:p>
+            <a:pPr algn="ctr">
+              <a:defRPr/>
+            </a:pPr>
+            <a:r>
+              <a:rPr sz="1400" b="1" i="0">
+                <a:solidFill>
+                  <a:srgbClr val="016F89"/>
+                </a:solidFill>
+                <a:latin typeface="Montserrat"/>
+                <a:ea typeface="Montserrat"/>
+                <a:cs typeface="Montserrat"/>
+              </a:rPr>
+              <a:t>Homens  ·  12 de 19</a:t>
+            </a:r>
+          </a:p>
+        </c:rich>
+      </c:tx>
+      <c:layout/>
+      <c:overlay val="0"/>
+    </c:title>
+    <c:autoTitleDeleted val="0"/>
+    <c:plotArea>
+      <c:pieChart>
+        <c:varyColors val="1"/>
+        <c:ser>
+          <c:idx val="0"/>
+          <c:order val="0"/>
+          <c:tx>
+            <c:strRef>
+              <c:f>Sheet1!$B$1</c:f>
+              <c:strCache>
+                <c:ptCount val="1"/>
+                <c:pt idx="0">
+                  <c:v>Homens  ·  12 de 19</c:v>
+                </c:pt>
+              </c:strCache>
+            </c:strRef>
+          </c:tx>
+          <c:dPt>
+            <c:idx val="0"/>
+            <c:spPr>
+              <a:solidFill>
+                <a:srgbClr val="00C2CB"/>
+              </a:solidFill>
+              <a:ln>
+                <a:noFill/>
+              </a:ln>
+            </c:spPr>
+          </c:dPt>
+          <c:dPt>
+            <c:idx val="1"/>
+            <c:spPr>
+              <a:solidFill>
+                <a:srgbClr val="016F89"/>
+              </a:solidFill>
+              <a:ln>
+                <a:noFill/>
+              </a:ln>
+            </c:spPr>
+          </c:dPt>
+          <c:cat>
+            <c:strRef>
+              <c:f>Sheet1!$A$2:$A$3</c:f>
+              <c:strCache>
+                <c:ptCount val="2"/>
+                <c:pt idx="0">
+                  <c:v>Conhece  63,2%</c:v>
+                </c:pt>
+                <c:pt idx="1">
+                  <c:v>Não conhece  36,8%</c:v>
+                </c:pt>
+              </c:strCache>
+            </c:strRef>
+          </c:cat>
+          <c:val>
+            <c:numRef>
+              <c:f>Sheet1!$B$2:$B$3</c:f>
+              <c:numCache>
+                <c:formatCode>General</c:formatCode>
+                <c:ptCount val="2"/>
+                <c:pt idx="0">
+                  <c:v>12</c:v>
+                </c:pt>
+                <c:pt idx="1">
+                  <c:v>7</c:v>
+                </c:pt>
+              </c:numCache>
+            </c:numRef>
+          </c:val>
+        </c:ser>
+      </c:pieChart>
+    </c:plotArea>
+    <c:legend>
+      <c:legendPos val="b"/>
+      <c:overlay val="0"/>
+      <c:txPr>
+        <a:bodyPr/>
+        <a:lstStyle/>
+        <a:p>
+          <a:pPr>
+            <a:defRPr sz="1100">
+              <a:solidFill>
+                <a:srgbClr val="1E293B"/>
+              </a:solidFill>
+              <a:latin typeface="Open Sans"/>
+            </a:defRPr>
+          </a:pPr>
+        </a:p>
+      </c:txPr>
+    </c:legend>
+    <c:dispBlanksAs val="gap"/>
+  </c:chart>
+  <c:txPr>
+    <a:bodyPr/>
+    <a:lstStyle/>
+    <a:p>
+      <a:pPr>
+        <a:defRPr sz="1800"/>
+      </a:pPr>
+      <a:endParaRPr lang="en-US"/>
+    </a:p>
+  </c:txPr>
+  <c:externalData r:id="rId1">
+    <c:autoUpdate val="0"/>
+  </c:externalData>
+</c:chartSpace>
 </file>
 
 <file path=ppt/slideLayouts/slideLayout1.xml><?xml version="1.0" encoding="utf-8"?>
@@ -3690,6 +5011,747 @@
 </p:sld>
 </file>
 
+<file path=ppt/slides/slide10.xml><?xml version="1.0" encoding="utf-8"?>
+<p:sld xmlns:a="http://schemas.openxmlformats.org/drawingml/2006/main" xmlns:p="http://schemas.openxmlformats.org/presentationml/2006/main" xmlns:r="http://schemas.openxmlformats.org/officeDocument/2006/relationships">
+  <p:cSld>
+    <p:bg>
+      <p:bgPr>
+        <a:solidFill>
+          <a:srgbClr val="FFFFFF"/>
+        </a:solidFill>
+        <a:effectLst/>
+      </p:bgPr>
+    </p:bg>
+    <p:spTree>
+      <p:nvGrpSpPr>
+        <p:cNvPr id="1" name=""/>
+        <p:cNvGrpSpPr/>
+        <p:nvPr/>
+      </p:nvGrpSpPr>
+      <p:grpSpPr/>
+      <p:sp>
+        <p:nvSpPr>
+          <p:cNvPr id="2" name="Rectangle 1"/>
+          <p:cNvSpPr/>
+          <p:nvPr/>
+        </p:nvSpPr>
+        <p:spPr>
+          <a:xfrm>
+            <a:off x="0" y="0"/>
+            <a:ext cx="12192000" cy="739080"/>
+          </a:xfrm>
+          <a:prstGeom prst="rect">
+            <a:avLst/>
+          </a:prstGeom>
+          <a:solidFill>
+            <a:srgbClr val="016F89"/>
+          </a:solidFill>
+          <a:ln>
+            <a:noFill/>
+          </a:ln>
+          <a:effectLst/>
+        </p:spPr>
+        <p:style>
+          <a:lnRef idx="1">
+            <a:schemeClr val="accent1"/>
+          </a:lnRef>
+          <a:fillRef idx="3">
+            <a:schemeClr val="accent1"/>
+          </a:fillRef>
+          <a:effectRef idx="2">
+            <a:schemeClr val="accent1"/>
+          </a:effectRef>
+          <a:fontRef idx="minor">
+            <a:schemeClr val="lt1"/>
+          </a:fontRef>
+        </p:style>
+        <p:txBody>
+          <a:bodyPr rtlCol="0" anchor="ctr"/>
+          <a:lstStyle/>
+          <a:p>
+            <a:pPr algn="ctr"/>
+            <a:endParaRPr/>
+          </a:p>
+        </p:txBody>
+      </p:sp>
+      <p:sp>
+        <p:nvSpPr>
+          <p:cNvPr id="3" name="Rectangle 2"/>
+          <p:cNvSpPr/>
+          <p:nvPr/>
+        </p:nvSpPr>
+        <p:spPr>
+          <a:xfrm>
+            <a:off x="0" y="6410325"/>
+            <a:ext cx="12192000" cy="447675"/>
+          </a:xfrm>
+          <a:prstGeom prst="rect">
+            <a:avLst/>
+          </a:prstGeom>
+          <a:solidFill>
+            <a:srgbClr val="F8FAFC"/>
+          </a:solidFill>
+          <a:ln>
+            <a:noFill/>
+          </a:ln>
+          <a:effectLst/>
+        </p:spPr>
+        <p:style>
+          <a:lnRef idx="1">
+            <a:schemeClr val="accent1"/>
+          </a:lnRef>
+          <a:fillRef idx="3">
+            <a:schemeClr val="accent1"/>
+          </a:fillRef>
+          <a:effectRef idx="2">
+            <a:schemeClr val="accent1"/>
+          </a:effectRef>
+          <a:fontRef idx="minor">
+            <a:schemeClr val="lt1"/>
+          </a:fontRef>
+        </p:style>
+        <p:txBody>
+          <a:bodyPr rtlCol="0" anchor="ctr"/>
+          <a:lstStyle/>
+          <a:p>
+            <a:pPr algn="ctr"/>
+            <a:endParaRPr/>
+          </a:p>
+        </p:txBody>
+      </p:sp>
+      <p:sp>
+        <p:nvSpPr>
+          <p:cNvPr id="4" name="Rectangle 3"/>
+          <p:cNvSpPr/>
+          <p:nvPr/>
+        </p:nvSpPr>
+        <p:spPr>
+          <a:xfrm>
+            <a:off x="0" y="700980"/>
+            <a:ext cx="12192000" cy="38100"/>
+          </a:xfrm>
+          <a:prstGeom prst="rect">
+            <a:avLst/>
+          </a:prstGeom>
+          <a:solidFill>
+            <a:srgbClr val="00C2CB"/>
+          </a:solidFill>
+          <a:ln>
+            <a:noFill/>
+          </a:ln>
+          <a:effectLst/>
+        </p:spPr>
+        <p:style>
+          <a:lnRef idx="1">
+            <a:schemeClr val="accent1"/>
+          </a:lnRef>
+          <a:fillRef idx="3">
+            <a:schemeClr val="accent1"/>
+          </a:fillRef>
+          <a:effectRef idx="2">
+            <a:schemeClr val="accent1"/>
+          </a:effectRef>
+          <a:fontRef idx="minor">
+            <a:schemeClr val="lt1"/>
+          </a:fontRef>
+        </p:style>
+        <p:txBody>
+          <a:bodyPr rtlCol="0" anchor="ctr"/>
+          <a:lstStyle/>
+          <a:p>
+            <a:pPr algn="ctr"/>
+            <a:endParaRPr/>
+          </a:p>
+        </p:txBody>
+      </p:sp>
+      <p:sp>
+        <p:nvSpPr>
+          <p:cNvPr id="5" name="Rectangle 4"/>
+          <p:cNvSpPr/>
+          <p:nvPr/>
+        </p:nvSpPr>
+        <p:spPr>
+          <a:xfrm>
+            <a:off x="0" y="6410325"/>
+            <a:ext cx="12192000" cy="9525"/>
+          </a:xfrm>
+          <a:prstGeom prst="rect">
+            <a:avLst/>
+          </a:prstGeom>
+          <a:solidFill>
+            <a:srgbClr val="E2E8F0"/>
+          </a:solidFill>
+          <a:ln>
+            <a:noFill/>
+          </a:ln>
+          <a:effectLst/>
+        </p:spPr>
+        <p:style>
+          <a:lnRef idx="1">
+            <a:schemeClr val="accent1"/>
+          </a:lnRef>
+          <a:fillRef idx="3">
+            <a:schemeClr val="accent1"/>
+          </a:fillRef>
+          <a:effectRef idx="2">
+            <a:schemeClr val="accent1"/>
+          </a:effectRef>
+          <a:fontRef idx="minor">
+            <a:schemeClr val="lt1"/>
+          </a:fontRef>
+        </p:style>
+        <p:txBody>
+          <a:bodyPr rtlCol="0" anchor="ctr"/>
+          <a:lstStyle/>
+          <a:p>
+            <a:pPr algn="ctr"/>
+            <a:endParaRPr/>
+          </a:p>
+        </p:txBody>
+      </p:sp>
+      <p:sp>
+        <p:nvSpPr>
+          <p:cNvPr id="25" name="TextBox 24"/>
+          <p:cNvSpPr txBox="1"/>
+          <p:nvPr/>
+        </p:nvSpPr>
+        <p:spPr>
+          <a:xfrm>
+            <a:off x="457200" y="190500"/>
+            <a:ext cx="8600000" cy="320601"/>
+          </a:xfrm>
+          <a:prstGeom prst="rect">
+            <a:avLst/>
+          </a:prstGeom>
+          <a:noFill/>
+        </p:spPr>
+        <p:txBody>
+          <a:bodyPr wrap="square" lIns="0" tIns="0" rIns="0" bIns="0" anchor="t"/>
+          <a:lstStyle/>
+          <a:p>
+            <a:pPr algn="l">
+              <a:lnSpc>
+                <a:spcPts val="2200"/>
+              </a:lnSpc>
+              <a:spcBef>
+                <a:spcPts val="0"/>
+              </a:spcBef>
+              <a:spcAft>
+                <a:spcPts val="0"/>
+              </a:spcAft>
+            </a:pPr>
+            <a:r>
+              <a:rPr sz="2000" b="1" i="0">
+                <a:solidFill>
+                  <a:srgbClr val="FFFFFF"/>
+                </a:solidFill>
+                <a:latin typeface="Montserrat"/>
+                <a:ea typeface="Montserrat"/>
+                <a:cs typeface="Montserrat"/>
+              </a:rPr>
+              <a:t>8. Impactos e conclusão</a:t>
+            </a:r>
+          </a:p>
+        </p:txBody>
+      </p:sp>
+      <p:sp>
+        <p:nvSpPr>
+          <p:cNvPr id="26" name="TextBox 25"/>
+          <p:cNvSpPr txBox="1"/>
+          <p:nvPr/>
+        </p:nvSpPr>
+        <p:spPr>
+          <a:xfrm>
+            <a:off x="457200" y="6553200"/>
+            <a:ext cx="7800000" cy="161583"/>
+          </a:xfrm>
+          <a:prstGeom prst="rect">
+            <a:avLst/>
+          </a:prstGeom>
+          <a:noFill/>
+        </p:spPr>
+        <p:txBody>
+          <a:bodyPr wrap="square" lIns="0" tIns="0" rIns="0" bIns="0" anchor="t"/>
+          <a:lstStyle/>
+          <a:p>
+            <a:pPr algn="l">
+              <a:lnSpc>
+                <a:spcPts val="1400"/>
+              </a:lnSpc>
+              <a:spcBef>
+                <a:spcPts val="0"/>
+              </a:spcBef>
+              <a:spcAft>
+                <a:spcPts val="0"/>
+              </a:spcAft>
+            </a:pPr>
+            <a:r>
+              <a:rPr sz="1100" b="0" i="0">
+                <a:solidFill>
+                  <a:srgbClr val="64748B"/>
+                </a:solidFill>
+                <a:latin typeface="Montserrat"/>
+                <a:ea typeface="Montserrat"/>
+                <a:cs typeface="Montserrat"/>
+              </a:rPr>
+              <a:t>Deepfake, riscos e algoritmos</a:t>
+            </a:r>
+          </a:p>
+        </p:txBody>
+      </p:sp>
+      <p:sp>
+        <p:nvSpPr>
+          <p:cNvPr id="28" name="TextBox 27"/>
+          <p:cNvSpPr txBox="1"/>
+          <p:nvPr/>
+        </p:nvSpPr>
+        <p:spPr>
+          <a:xfrm>
+            <a:off x="10267950" y="264765"/>
+            <a:ext cx="1401025" cy="161583"/>
+          </a:xfrm>
+          <a:prstGeom prst="rect">
+            <a:avLst/>
+          </a:prstGeom>
+          <a:noFill/>
+        </p:spPr>
+        <p:txBody>
+          <a:bodyPr wrap="none" lIns="0" tIns="0" rIns="0" bIns="0" anchor="t">
+            <a:spAutoFit/>
+          </a:bodyPr>
+          <a:lstStyle/>
+          <a:p>
+            <a:pPr algn="l"/>
+            <a:r>
+              <a:rPr sz="1050" b="1" i="0" u="none" dirty="0" smtClean="0">
+                <a:solidFill>
+                  <a:srgbClr val="A5F3FC"/>
+                </a:solidFill>
+                <a:latin typeface="Montserrat"/>
+              </a:rPr>
+              <a:t>X</a:t>
+            </a:r>
+            <a:r>
+              <a:rPr lang="pt-BR" sz="1050" b="1" dirty="0" smtClean="0">
+                <a:solidFill>
+                  <a:srgbClr val="A5F3FC"/>
+                </a:solidFill>
+                <a:latin typeface="Montserrat"/>
+              </a:rPr>
+              <a:t>IV</a:t>
+            </a:r>
+            <a:r>
+              <a:rPr sz="1050" b="1" i="0" u="none" dirty="0" smtClean="0">
+                <a:solidFill>
+                  <a:srgbClr val="A5F3FC"/>
+                </a:solidFill>
+                <a:latin typeface="Montserrat"/>
+              </a:rPr>
+              <a:t> </a:t>
+            </a:r>
+            <a:r>
+              <a:rPr sz="1050" b="1" i="0" u="none" dirty="0">
+                <a:solidFill>
+                  <a:srgbClr val="A5F3FC"/>
+                </a:solidFill>
+                <a:latin typeface="Montserrat"/>
+              </a:rPr>
+              <a:t>JIC UNESA </a:t>
+            </a:r>
+            <a:r>
+              <a:rPr lang="pt-BR" sz="1050" b="1" i="0" u="none" dirty="0" smtClean="0">
+                <a:solidFill>
+                  <a:srgbClr val="A5F3FC"/>
+                </a:solidFill>
+                <a:latin typeface="Montserrat"/>
+              </a:rPr>
+              <a:t>(</a:t>
+            </a:r>
+            <a:r>
+              <a:rPr sz="1050" b="1" i="0" u="none" dirty="0" smtClean="0">
+                <a:solidFill>
+                  <a:srgbClr val="A5F3FC"/>
+                </a:solidFill>
+                <a:latin typeface="Montserrat"/>
+              </a:rPr>
+              <a:t>2026</a:t>
+            </a:r>
+            <a:r>
+              <a:rPr lang="pt-BR" sz="1050" b="1" i="0" u="none" dirty="0" smtClean="0">
+                <a:solidFill>
+                  <a:srgbClr val="A5F3FC"/>
+                </a:solidFill>
+                <a:latin typeface="Montserrat"/>
+              </a:rPr>
+              <a:t>)</a:t>
+            </a:r>
+            <a:endParaRPr sz="1050" b="1" i="0" u="none" dirty="0">
+              <a:solidFill>
+                <a:srgbClr val="A5F3FC"/>
+              </a:solidFill>
+              <a:latin typeface="Montserrat"/>
+            </a:endParaRPr>
+          </a:p>
+        </p:txBody>
+      </p:sp>
+      <p:pic>
+        <p:nvPicPr>
+          <p:cNvPr id="35" name="Picture 9"/>
+          <p:cNvPicPr/>
+          <p:nvPr/>
+        </p:nvPicPr>
+        <p:blipFill>
+          <a:blip r:embed="rId2"/>
+          <a:stretch/>
+        </p:blipFill>
+        <p:spPr>
+          <a:xfrm>
+            <a:off x="9716240" y="125002"/>
+            <a:ext cx="461819" cy="391625"/>
+          </a:xfrm>
+          <a:prstGeom prst="rect">
+            <a:avLst/>
+          </a:prstGeom>
+          <a:ln w="0">
+            <a:noFill/>
+          </a:ln>
+        </p:spPr>
+      </p:pic>
+      <p:sp>
+        <p:nvSpPr>
+          <p:cNvPr id="36" name="TextBox 35"/>
+          <p:cNvSpPr txBox="1"/>
+          <p:nvPr/>
+        </p:nvSpPr>
+        <p:spPr>
+          <a:xfrm>
+            <a:off x="502920" y="960000"/>
+            <a:ext cx="11100000" cy="5300000"/>
+          </a:xfrm>
+          <a:prstGeom prst="rect">
+            <a:avLst/>
+          </a:prstGeom>
+          <a:noFill/>
+        </p:spPr>
+        <p:txBody>
+          <a:bodyPr wrap="square" anchor="t"/>
+          <a:lstStyle/>
+          <a:p>
+            <a:pPr algn="l">
+              <a:lnSpc>
+                <a:spcPts val="2400"/>
+              </a:lnSpc>
+              <a:spcBef>
+                <a:spcPts val="0"/>
+              </a:spcBef>
+              <a:spcAft>
+                <a:spcPts val="600"/>
+              </a:spcAft>
+            </a:pPr>
+            <a:r>
+              <a:rPr sz="2000" b="1" i="0">
+                <a:solidFill>
+                  <a:srgbClr val="016F89"/>
+                </a:solidFill>
+                <a:latin typeface="Montserrat"/>
+                <a:ea typeface="Montserrat"/>
+                <a:cs typeface="Montserrat"/>
+              </a:rPr>
+              <a:t>O que o uso indevido provoca</a:t>
+            </a:r>
+          </a:p>
+          <a:p>
+            <a:pPr algn="l">
+              <a:lnSpc>
+                <a:spcPts val="2200"/>
+              </a:lnSpc>
+              <a:spcBef>
+                <a:spcPts val="100"/>
+              </a:spcBef>
+              <a:spcAft>
+                <a:spcPts val="300"/>
+              </a:spcAft>
+            </a:pPr>
+            <a:r>
+              <a:rPr sz="1700" b="1" i="0">
+                <a:solidFill>
+                  <a:srgbClr val="016F89"/>
+                </a:solidFill>
+                <a:latin typeface="Open Sans"/>
+                <a:ea typeface="Open Sans"/>
+                <a:cs typeface="Open Sans"/>
+              </a:rPr>
+              <a:t>•  </a:t>
+            </a:r>
+            <a:r>
+              <a:rPr sz="1700" b="0" i="0">
+                <a:solidFill>
+                  <a:srgbClr val="1E293B"/>
+                </a:solidFill>
+                <a:latin typeface="Open Sans"/>
+                <a:ea typeface="Open Sans"/>
+                <a:cs typeface="Open Sans"/>
+              </a:rPr>
+              <a:t>Nudificação: uma foto cotidiana vira nudez sintética.</a:t>
+            </a:r>
+          </a:p>
+          <a:p>
+            <a:pPr algn="l">
+              <a:lnSpc>
+                <a:spcPts val="2200"/>
+              </a:lnSpc>
+              <a:spcBef>
+                <a:spcPts val="100"/>
+              </a:spcBef>
+              <a:spcAft>
+                <a:spcPts val="300"/>
+              </a:spcAft>
+            </a:pPr>
+            <a:r>
+              <a:rPr sz="1700" b="1" i="0">
+                <a:solidFill>
+                  <a:srgbClr val="016F89"/>
+                </a:solidFill>
+                <a:latin typeface="Open Sans"/>
+                <a:ea typeface="Open Sans"/>
+                <a:cs typeface="Open Sans"/>
+              </a:rPr>
+              <a:t>•  </a:t>
+            </a:r>
+            <a:r>
+              <a:rPr sz="1700" b="0" i="0">
+                <a:solidFill>
+                  <a:srgbClr val="1E293B"/>
+                </a:solidFill>
+                <a:latin typeface="Open Sans"/>
+                <a:ea typeface="Open Sans"/>
+                <a:cs typeface="Open Sans"/>
+              </a:rPr>
+              <a:t>Na literatura do relatório, cerca de 95% da pornografia deepfake mira mulheres e meninas. O Unicef estima 1,2 milhão de crianças atingidas, em 11 países, no ano anterior ao relatório de 2026.</a:t>
+            </a:r>
+          </a:p>
+          <a:p>
+            <a:pPr algn="l">
+              <a:lnSpc>
+                <a:spcPts val="2200"/>
+              </a:lnSpc>
+              <a:spcBef>
+                <a:spcPts val="100"/>
+              </a:spcBef>
+              <a:spcAft>
+                <a:spcPts val="300"/>
+              </a:spcAft>
+            </a:pPr>
+            <a:r>
+              <a:rPr sz="1700" b="1" i="0">
+                <a:solidFill>
+                  <a:srgbClr val="016F89"/>
+                </a:solidFill>
+                <a:latin typeface="Open Sans"/>
+                <a:ea typeface="Open Sans"/>
+                <a:cs typeface="Open Sans"/>
+              </a:rPr>
+              <a:t>•  </a:t>
+            </a:r>
+            <a:r>
+              <a:rPr sz="1700" b="0" i="0">
+                <a:solidFill>
+                  <a:srgbClr val="1E293B"/>
+                </a:solidFill>
+                <a:latin typeface="Open Sans"/>
+                <a:ea typeface="Open Sans"/>
+                <a:cs typeface="Open Sans"/>
+              </a:rPr>
+              <a:t>Na escola, isso vira exposição e cyberbullying. O silêncio medido na amostra deixa o conteúdo circular.</a:t>
+            </a:r>
+          </a:p>
+          <a:p>
+            <a:pPr algn="l">
+              <a:lnSpc>
+                <a:spcPts val="2200"/>
+              </a:lnSpc>
+              <a:spcBef>
+                <a:spcPts val="0"/>
+              </a:spcBef>
+              <a:spcAft>
+                <a:spcPts val="600"/>
+              </a:spcAft>
+            </a:pPr>
+            <a:r>
+              <a:rPr sz="1700" b="0" i="0">
+                <a:solidFill>
+                  <a:srgbClr val="1E293B"/>
+                </a:solidFill>
+                <a:latin typeface="Open Sans"/>
+                <a:ea typeface="Open Sans"/>
+                <a:cs typeface="Open Sans"/>
+              </a:rPr>
+              <a:t>O grupo mais visado é o que, nesta amostra, menos conhece as ferramentas de defesa.</a:t>
+            </a:r>
+          </a:p>
+          <a:p>
+            <a:pPr algn="l">
+              <a:lnSpc>
+                <a:spcPts val="2400"/>
+              </a:lnSpc>
+              <a:spcBef>
+                <a:spcPts val="1200"/>
+              </a:spcBef>
+              <a:spcAft>
+                <a:spcPts val="600"/>
+              </a:spcAft>
+            </a:pPr>
+            <a:r>
+              <a:rPr sz="2000" b="1" i="0">
+                <a:solidFill>
+                  <a:srgbClr val="016F89"/>
+                </a:solidFill>
+                <a:latin typeface="Montserrat"/>
+                <a:ea typeface="Montserrat"/>
+                <a:cs typeface="Montserrat"/>
+              </a:rPr>
+              <a:t>Conclusão</a:t>
+            </a:r>
+          </a:p>
+          <a:p>
+            <a:pPr algn="l">
+              <a:lnSpc>
+                <a:spcPts val="2200"/>
+              </a:lnSpc>
+              <a:spcBef>
+                <a:spcPts val="100"/>
+              </a:spcBef>
+              <a:spcAft>
+                <a:spcPts val="300"/>
+              </a:spcAft>
+            </a:pPr>
+            <a:r>
+              <a:rPr sz="1700" b="1" i="0">
+                <a:solidFill>
+                  <a:srgbClr val="016F89"/>
+                </a:solidFill>
+                <a:latin typeface="Open Sans"/>
+                <a:ea typeface="Open Sans"/>
+                <a:cs typeface="Open Sans"/>
+              </a:rPr>
+              <a:t>•  </a:t>
+            </a:r>
+            <a:r>
+              <a:rPr sz="1700" b="0" i="0">
+                <a:solidFill>
+                  <a:srgbClr val="1E293B"/>
+                </a:solidFill>
+                <a:latin typeface="Open Sans"/>
+                <a:ea typeface="Open Sans"/>
+                <a:cs typeface="Open Sans"/>
+              </a:rPr>
+              <a:t>O acesso ficou fácil, e a familiaridade com o termo não virou capacidade de verificação.</a:t>
+            </a:r>
+          </a:p>
+          <a:p>
+            <a:pPr algn="l">
+              <a:lnSpc>
+                <a:spcPts val="2200"/>
+              </a:lnSpc>
+              <a:spcBef>
+                <a:spcPts val="100"/>
+              </a:spcBef>
+              <a:spcAft>
+                <a:spcPts val="300"/>
+              </a:spcAft>
+            </a:pPr>
+            <a:r>
+              <a:rPr sz="1700" b="1" i="0">
+                <a:solidFill>
+                  <a:srgbClr val="016F89"/>
+                </a:solidFill>
+                <a:latin typeface="Open Sans"/>
+                <a:ea typeface="Open Sans"/>
+                <a:cs typeface="Open Sans"/>
+              </a:rPr>
+              <a:t>•  </a:t>
+            </a:r>
+            <a:r>
+              <a:rPr sz="1700" b="0" i="0">
+                <a:solidFill>
+                  <a:srgbClr val="1E293B"/>
+                </a:solidFill>
+                <a:latin typeface="Open Sans"/>
+                <a:ea typeface="Open Sans"/>
+                <a:cs typeface="Open Sans"/>
+              </a:rPr>
+              <a:t>A exposição já é concreta, e a reação mais comum é o silêncio.</a:t>
+            </a:r>
+          </a:p>
+          <a:p>
+            <a:pPr algn="l">
+              <a:lnSpc>
+                <a:spcPts val="2200"/>
+              </a:lnSpc>
+              <a:spcBef>
+                <a:spcPts val="100"/>
+              </a:spcBef>
+              <a:spcAft>
+                <a:spcPts val="300"/>
+              </a:spcAft>
+            </a:pPr>
+            <a:r>
+              <a:rPr sz="1700" b="1" i="0">
+                <a:solidFill>
+                  <a:srgbClr val="016F89"/>
+                </a:solidFill>
+                <a:latin typeface="Open Sans"/>
+                <a:ea typeface="Open Sans"/>
+                <a:cs typeface="Open Sans"/>
+              </a:rPr>
+              <a:t>•  </a:t>
+            </a:r>
+            <a:r>
+              <a:rPr sz="1700" b="0" i="0">
+                <a:solidFill>
+                  <a:srgbClr val="1E293B"/>
+                </a:solidFill>
+                <a:latin typeface="Open Sans"/>
+                <a:ea typeface="Open Sans"/>
+                <a:cs typeface="Open Sans"/>
+              </a:rPr>
+              <a:t>O enfrentamento apontado é o letramento digital na educação básica.</a:t>
+            </a:r>
+          </a:p>
+          <a:p>
+            <a:pPr algn="l">
+              <a:lnSpc>
+                <a:spcPts val="1800"/>
+              </a:lnSpc>
+              <a:spcBef>
+                <a:spcPts val="400"/>
+              </a:spcBef>
+              <a:spcAft>
+                <a:spcPts val="200"/>
+              </a:spcAft>
+            </a:pPr>
+            <a:r>
+              <a:rPr sz="1400" b="0" i="0">
+                <a:solidFill>
+                  <a:srgbClr val="475569"/>
+                </a:solidFill>
+                <a:latin typeface="Open Sans"/>
+                <a:ea typeface="Open Sans"/>
+                <a:cs typeface="Open Sans"/>
+              </a:rPr>
+              <a:t>Próximo passo do relatório: ampliar a amostra e testar ações de letramento com o público infantojuvenil.</a:t>
+            </a:r>
+          </a:p>
+        </p:txBody>
+      </p:sp>
+    </p:spTree>
+  </p:cSld>
+  <p:clrMapOvr>
+    <a:masterClrMapping/>
+  </p:clrMapOvr>
+</p:sld>
+</file>
+
 <file path=ppt/slides/slide2.xml><?xml version="1.0" encoding="utf-8"?>
 <p:sld xmlns:a="http://schemas.openxmlformats.org/drawingml/2006/main" xmlns:r="http://schemas.openxmlformats.org/officeDocument/2006/relationships" xmlns:p="http://schemas.openxmlformats.org/presentationml/2006/main">
   <p:cSld>
@@ -4112,7 +6174,7 @@
         <p:spPr>
           <a:xfrm>
             <a:off x="502920" y="980000"/>
-            <a:ext cx="11186000" cy="5250000"/>
+            <a:ext cx="11100000" cy="5200000"/>
           </a:xfrm>
           <a:prstGeom prst="rect">
             <a:avLst/>
@@ -4120,32 +6182,8 @@
           <a:noFill/>
         </p:spPr>
         <p:txBody>
-          <a:bodyPr wrap="square"/>
-          <a:lstStyle/>
-          <a:p>
-            <a:pPr algn="l">
-              <a:lnSpc>
-                <a:spcPts val="2600"/>
-              </a:lnSpc>
-              <a:spcBef>
-                <a:spcPts val="0"/>
-              </a:spcBef>
-              <a:spcAft>
-                <a:spcPts val="800"/>
-              </a:spcAft>
-            </a:pPr>
-            <a:r>
-              <a:rPr sz="2000" b="1" i="0">
-                <a:solidFill>
-                  <a:srgbClr val="016F89"/>
-                </a:solidFill>
-                <a:latin typeface="Montserrat"/>
-                <a:ea typeface="Montserrat"/>
-                <a:cs typeface="Montserrat"/>
-              </a:rPr>
-              <a:t>Objetivo geral</a:t>
-            </a:r>
-          </a:p>
+          <a:bodyPr wrap="square" anchor="t"/>
+          <a:lstStyle/>
           <a:p>
             <a:pPr algn="l">
               <a:lnSpc>
@@ -4155,11 +6193,35 @@
                 <a:spcPts val="0"/>
               </a:spcBef>
               <a:spcAft>
-                <a:spcPts val="800"/>
+                <a:spcPts val="600"/>
               </a:spcAft>
             </a:pPr>
             <a:r>
-              <a:rPr sz="1800" b="0" i="0">
+              <a:rPr sz="2000" b="1" i="0">
+                <a:solidFill>
+                  <a:srgbClr val="016F89"/>
+                </a:solidFill>
+                <a:latin typeface="Montserrat"/>
+                <a:ea typeface="Montserrat"/>
+                <a:cs typeface="Montserrat"/>
+              </a:rPr>
+              <a:t>Objetivo geral</a:t>
+            </a:r>
+          </a:p>
+          <a:p>
+            <a:pPr algn="l">
+              <a:lnSpc>
+                <a:spcPts val="2200"/>
+              </a:lnSpc>
+              <a:spcBef>
+                <a:spcPts val="0"/>
+              </a:spcBef>
+              <a:spcAft>
+                <a:spcPts val="600"/>
+              </a:spcAft>
+            </a:pPr>
+            <a:r>
+              <a:rPr sz="1700" b="0" i="0">
                 <a:solidFill>
                   <a:srgbClr val="1E293B"/>
                 </a:solidFill>
@@ -4167,31 +6229,7 @@
                 <a:ea typeface="Open Sans"/>
                 <a:cs typeface="Open Sans"/>
               </a:rPr>
-              <a:t>Analisar os impactos do acesso de jovens ao deepfake: como a tecnologia funciona e o que o uso indevido provoca, sobretudo na escola.</a:t>
-            </a:r>
-          </a:p>
-          <a:p>
-            <a:pPr algn="l">
-              <a:lnSpc>
-                <a:spcPts val="2600"/>
-              </a:lnSpc>
-              <a:spcBef>
-                <a:spcPts val="1400"/>
-              </a:spcBef>
-              <a:spcAft>
-                <a:spcPts val="800"/>
-              </a:spcAft>
-            </a:pPr>
-            <a:r>
-              <a:rPr sz="2000" b="1" i="0">
-                <a:solidFill>
-                  <a:srgbClr val="016F89"/>
-                </a:solidFill>
-                <a:latin typeface="Montserrat"/>
-                <a:ea typeface="Montserrat"/>
-                <a:cs typeface="Montserrat"/>
-              </a:rPr>
-              <a:t>O problema</a:t>
+              <a:t>Analisar os impactos do acesso de jovens ao deepfake: o funcionamento dos algoritmos e as consequências do uso indevido, com ênfase na escola.</a:t>
             </a:r>
           </a:p>
           <a:p>
@@ -4200,14 +6238,38 @@
                 <a:spcPts val="2400"/>
               </a:lnSpc>
               <a:spcBef>
+                <a:spcPts val="1200"/>
+              </a:spcBef>
+              <a:spcAft>
+                <a:spcPts val="600"/>
+              </a:spcAft>
+            </a:pPr>
+            <a:r>
+              <a:rPr sz="2000" b="1" i="0">
+                <a:solidFill>
+                  <a:srgbClr val="016F89"/>
+                </a:solidFill>
+                <a:latin typeface="Montserrat"/>
+                <a:ea typeface="Montserrat"/>
+                <a:cs typeface="Montserrat"/>
+              </a:rPr>
+              <a:t>Quando uma tecnologia é invasiva</a:t>
+            </a:r>
+          </a:p>
+          <a:p>
+            <a:pPr algn="l">
+              <a:lnSpc>
+                <a:spcPts val="2200"/>
+              </a:lnSpc>
+              <a:spcBef>
                 <a:spcPts val="0"/>
               </a:spcBef>
               <a:spcAft>
-                <a:spcPts val="800"/>
+                <a:spcPts val="600"/>
               </a:spcAft>
             </a:pPr>
             <a:r>
-              <a:rPr sz="1800" b="0" i="0">
+              <a:rPr sz="1700" b="0" i="0">
                 <a:solidFill>
                   <a:srgbClr val="1E293B"/>
                 </a:solidFill>
@@ -4215,7 +6277,136 @@
                 <a:ea typeface="Open Sans"/>
                 <a:cs typeface="Open Sans"/>
               </a:rPr>
-              <a:t>Aplicativos plug-and-play tiraram a barreira técnica. Conhecer o nome da ferramenta não significa saber detectar, reagir ou se proteger.</a:t>
+              <a:t>Quando viola imagem, voz ou expressão sem consentimento. O deepfake convence quem assiste, então o dano não depende de fraude financeira: a confiança e a privacidade já foram quebradas.</a:t>
+            </a:r>
+          </a:p>
+          <a:p>
+            <a:pPr algn="l">
+              <a:lnSpc>
+                <a:spcPts val="2400"/>
+              </a:lnSpc>
+              <a:spcBef>
+                <a:spcPts val="1200"/>
+              </a:spcBef>
+              <a:spcAft>
+                <a:spcPts val="600"/>
+              </a:spcAft>
+            </a:pPr>
+            <a:r>
+              <a:rPr sz="2000" b="1" i="0">
+                <a:solidFill>
+                  <a:srgbClr val="016F89"/>
+                </a:solidFill>
+                <a:latin typeface="Montserrat"/>
+                <a:ea typeface="Montserrat"/>
+                <a:cs typeface="Montserrat"/>
+              </a:rPr>
+              <a:t>O que a pesquisa percorre</a:t>
+            </a:r>
+          </a:p>
+          <a:p>
+            <a:pPr algn="l">
+              <a:lnSpc>
+                <a:spcPts val="2200"/>
+              </a:lnSpc>
+              <a:spcBef>
+                <a:spcPts val="100"/>
+              </a:spcBef>
+              <a:spcAft>
+                <a:spcPts val="300"/>
+              </a:spcAft>
+            </a:pPr>
+            <a:r>
+              <a:rPr sz="1700" b="1" i="0">
+                <a:solidFill>
+                  <a:srgbClr val="016F89"/>
+                </a:solidFill>
+                <a:latin typeface="Open Sans"/>
+                <a:ea typeface="Open Sans"/>
+                <a:cs typeface="Open Sans"/>
+              </a:rPr>
+              <a:t>•  </a:t>
+            </a:r>
+            <a:r>
+              <a:rPr sz="1700" b="0" i="0">
+                <a:solidFill>
+                  <a:srgbClr val="1E293B"/>
+                </a:solidFill>
+                <a:latin typeface="Open Sans"/>
+                <a:ea typeface="Open Sans"/>
+                <a:cs typeface="Open Sans"/>
+              </a:rPr>
+              <a:t>Conceituar a tecnologia invasiva e documentar o algoritmo.</a:t>
+            </a:r>
+          </a:p>
+          <a:p>
+            <a:pPr algn="l">
+              <a:lnSpc>
+                <a:spcPts val="2200"/>
+              </a:lnSpc>
+              <a:spcBef>
+                <a:spcPts val="100"/>
+              </a:spcBef>
+              <a:spcAft>
+                <a:spcPts val="300"/>
+              </a:spcAft>
+            </a:pPr>
+            <a:r>
+              <a:rPr sz="1700" b="1" i="0">
+                <a:solidFill>
+                  <a:srgbClr val="016F89"/>
+                </a:solidFill>
+                <a:latin typeface="Open Sans"/>
+                <a:ea typeface="Open Sans"/>
+                <a:cs typeface="Open Sans"/>
+              </a:rPr>
+              <a:t>•  </a:t>
+            </a:r>
+            <a:r>
+              <a:rPr sz="1700" b="0" i="0">
+                <a:solidFill>
+                  <a:srgbClr val="1E293B"/>
+                </a:solidFill>
+                <a:latin typeface="Open Sans"/>
+                <a:ea typeface="Open Sans"/>
+                <a:cs typeface="Open Sans"/>
+              </a:rPr>
+              <a:t>Mostrar o que tirou a barreira técnica e espalhou o conteúdo.</a:t>
+            </a:r>
+          </a:p>
+          <a:p>
+            <a:pPr algn="l">
+              <a:lnSpc>
+                <a:spcPts val="2200"/>
+              </a:lnSpc>
+              <a:spcBef>
+                <a:spcPts val="100"/>
+              </a:spcBef>
+              <a:spcAft>
+                <a:spcPts val="300"/>
+              </a:spcAft>
+            </a:pPr>
+            <a:r>
+              <a:rPr sz="1700" b="1" i="0">
+                <a:solidFill>
+                  <a:srgbClr val="016F89"/>
+                </a:solidFill>
+                <a:latin typeface="Open Sans"/>
+                <a:ea typeface="Open Sans"/>
+                <a:cs typeface="Open Sans"/>
+              </a:rPr>
+              <a:t>•  </a:t>
+            </a:r>
+            <a:r>
+              <a:rPr sz="1700" b="0" i="0">
+                <a:solidFill>
+                  <a:srgbClr val="1E293B"/>
+                </a:solidFill>
+                <a:latin typeface="Open Sans"/>
+                <a:ea typeface="Open Sans"/>
+                <a:cs typeface="Open Sans"/>
+              </a:rPr>
+              <a:t>Medir, com 71 respostas, conhecimento, exposição e reação.</a:t>
             </a:r>
           </a:p>
         </p:txBody>
@@ -4472,7 +6663,7 @@
                 <a:ea typeface="Montserrat"/>
                 <a:cs typeface="Montserrat"/>
               </a:rPr>
-              <a:t>2. Metodologia</a:t>
+              <a:t>2. Os algoritmos</a:t>
             </a:r>
           </a:p>
         </p:txBody>
@@ -4648,8 +6839,8 @@
         </p:nvSpPr>
         <p:spPr>
           <a:xfrm>
-            <a:off x="502920" y="980000"/>
-            <a:ext cx="11186000" cy="5250000"/>
+            <a:off x="502920" y="900000"/>
+            <a:ext cx="11100000" cy="620000"/>
           </a:xfrm>
           <a:prstGeom prst="rect">
             <a:avLst/>
@@ -4657,22 +6848,90 @@
           <a:noFill/>
         </p:spPr>
         <p:txBody>
-          <a:bodyPr wrap="square"/>
+          <a:bodyPr wrap="square" anchor="t"/>
           <a:lstStyle/>
           <a:p>
             <a:pPr algn="l">
               <a:lnSpc>
-                <a:spcPts val="2600"/>
+                <a:spcPts val="2200"/>
               </a:lnSpc>
               <a:spcBef>
                 <a:spcPts val="0"/>
               </a:spcBef>
               <a:spcAft>
-                <a:spcPts val="800"/>
+                <a:spcPts val="600"/>
               </a:spcAft>
             </a:pPr>
             <a:r>
-              <a:rPr sz="2000" b="1" i="0">
+              <a:rPr sz="1700" b="0" i="0">
+                <a:solidFill>
+                  <a:srgbClr val="1E293B"/>
+                </a:solidFill>
+                <a:latin typeface="Open Sans"/>
+                <a:ea typeface="Open Sans"/>
+                <a:cs typeface="Open Sans"/>
+              </a:rPr>
+              <a:t>A rede não cola um rosto. Ela lê geometria, luz e movimento e devolve uma matriz nova de pixels.</a:t>
+            </a:r>
+          </a:p>
+        </p:txBody>
+      </p:sp>
+      <p:sp>
+        <p:nvSpPr>
+          <p:cNvPr id="37" name="Rounded Rectangle 36"/>
+          <p:cNvSpPr/>
+          <p:nvPr/>
+        </p:nvSpPr>
+        <p:spPr>
+          <a:xfrm>
+            <a:off x="500000" y="1580000"/>
+            <a:ext cx="3600000" cy="2500000"/>
+          </a:xfrm>
+          <a:prstGeom prst="roundRect">
+            <a:avLst>
+              <a:gd name="adj" fmla="val 8000"/>
+            </a:avLst>
+          </a:prstGeom>
+          <a:solidFill>
+            <a:srgbClr val="F8FAFC"/>
+          </a:solidFill>
+          <a:ln w="12700">
+            <a:solidFill>
+              <a:srgbClr val="E2E8F0"/>
+            </a:solidFill>
+          </a:ln>
+        </p:spPr>
+        <p:style>
+          <a:lnRef idx="1">
+            <a:schemeClr val="accent1"/>
+          </a:lnRef>
+          <a:fillRef idx="3">
+            <a:schemeClr val="accent1"/>
+          </a:fillRef>
+          <a:effectRef idx="2">
+            <a:schemeClr val="accent1"/>
+          </a:effectRef>
+          <a:fontRef idx="minor">
+            <a:schemeClr val="lt1"/>
+          </a:fontRef>
+        </p:style>
+        <p:txBody>
+          <a:bodyPr rtlCol="0" anchor="ctr" wrap="square" lIns="120000" rIns="120000" tIns="140000"/>
+          <a:lstStyle/>
+          <a:p>
+            <a:pPr algn="l">
+              <a:lnSpc>
+                <a:spcPts val="2000"/>
+              </a:lnSpc>
+              <a:spcBef>
+                <a:spcPts val="200"/>
+              </a:spcBef>
+              <a:spcAft>
+                <a:spcPts val="600"/>
+              </a:spcAft>
+            </a:pPr>
+            <a:r>
+              <a:rPr sz="1600" b="1" i="0">
                 <a:solidFill>
                   <a:srgbClr val="016F89"/>
                 </a:solidFill>
@@ -4680,152 +6939,23 @@
                 <a:ea typeface="Montserrat"/>
                 <a:cs typeface="Montserrat"/>
               </a:rPr>
-              <a:t>Como a evidência foi construída</a:t>
+              <a:t>Autoencoder</a:t>
             </a:r>
           </a:p>
           <a:p>
             <a:pPr algn="l">
               <a:lnSpc>
-                <a:spcPts val="2300"/>
-              </a:lnSpc>
-              <a:spcBef>
-                <a:spcPts val="100"/>
-              </a:spcBef>
-              <a:spcAft>
-                <a:spcPts val="400"/>
-              </a:spcAft>
-            </a:pPr>
-            <a:r>
-              <a:rPr sz="1800" b="1" i="0">
-                <a:solidFill>
-                  <a:srgbClr val="016F89"/>
-                </a:solidFill>
-                <a:latin typeface="Open Sans"/>
-                <a:ea typeface="Open Sans"/>
-                <a:cs typeface="Open Sans"/>
-              </a:rPr>
-              <a:t>•  </a:t>
-            </a:r>
-            <a:r>
-              <a:rPr sz="1800" b="0" i="0">
-                <a:solidFill>
-                  <a:srgbClr val="1E293B"/>
-                </a:solidFill>
-                <a:latin typeface="Open Sans"/>
-                <a:ea typeface="Open Sans"/>
-                <a:cs typeface="Open Sans"/>
-              </a:rPr>
-              <a:t>Revisão dos algoritmos geradores: autoencoders, GANs e modelos de difusão.</a:t>
-            </a:r>
-          </a:p>
-          <a:p>
-            <a:pPr algn="l">
-              <a:lnSpc>
-                <a:spcPts val="2300"/>
-              </a:lnSpc>
-              <a:spcBef>
-                <a:spcPts val="100"/>
-              </a:spcBef>
-              <a:spcAft>
-                <a:spcPts val="400"/>
-              </a:spcAft>
-            </a:pPr>
-            <a:r>
-              <a:rPr sz="1800" b="1" i="0">
-                <a:solidFill>
-                  <a:srgbClr val="016F89"/>
-                </a:solidFill>
-                <a:latin typeface="Open Sans"/>
-                <a:ea typeface="Open Sans"/>
-                <a:cs typeface="Open Sans"/>
-              </a:rPr>
-              <a:t>•  </a:t>
-            </a:r>
-            <a:r>
-              <a:rPr sz="1800" b="0" i="0">
-                <a:solidFill>
-                  <a:srgbClr val="1E293B"/>
-                </a:solidFill>
-                <a:latin typeface="Open Sans"/>
-                <a:ea typeface="Open Sans"/>
-                <a:cs typeface="Open Sans"/>
-              </a:rPr>
-              <a:t>Questionário quantitativo: 71 respostas válidas, em sua maioria no Rio de Janeiro.</a:t>
-            </a:r>
-          </a:p>
-          <a:p>
-            <a:pPr algn="l">
-              <a:lnSpc>
-                <a:spcPts val="2300"/>
-              </a:lnSpc>
-              <a:spcBef>
-                <a:spcPts val="100"/>
-              </a:spcBef>
-              <a:spcAft>
-                <a:spcPts val="400"/>
-              </a:spcAft>
-            </a:pPr>
-            <a:r>
-              <a:rPr sz="1800" b="1" i="0">
-                <a:solidFill>
-                  <a:srgbClr val="016F89"/>
-                </a:solidFill>
-                <a:latin typeface="Open Sans"/>
-                <a:ea typeface="Open Sans"/>
-                <a:cs typeface="Open Sans"/>
-              </a:rPr>
-              <a:t>•  </a:t>
-            </a:r>
-            <a:r>
-              <a:rPr sz="1800" b="0" i="0">
-                <a:solidFill>
-                  <a:srgbClr val="1E293B"/>
-                </a:solidFill>
-                <a:latin typeface="Open Sans"/>
-                <a:ea typeface="Open Sans"/>
-                <a:cs typeface="Open Sans"/>
-              </a:rPr>
-              <a:t>Frequências, percentuais e cruzamentos (qui-quadrado e teste exato de Fisher, p &lt; 0,05).</a:t>
-            </a:r>
-          </a:p>
-          <a:p>
-            <a:pPr algn="l">
-              <a:lnSpc>
-                <a:spcPts val="2600"/>
-              </a:lnSpc>
-              <a:spcBef>
-                <a:spcPts val="1400"/>
-              </a:spcBef>
-              <a:spcAft>
-                <a:spcPts val="800"/>
-              </a:spcAft>
-            </a:pPr>
-            <a:r>
-              <a:rPr sz="2000" b="1" i="0">
-                <a:solidFill>
-                  <a:srgbClr val="016F89"/>
-                </a:solidFill>
-                <a:latin typeface="Montserrat"/>
-                <a:ea typeface="Montserrat"/>
-                <a:cs typeface="Montserrat"/>
-              </a:rPr>
-              <a:t>Quem respondeu</a:t>
-            </a:r>
-          </a:p>
-          <a:p>
-            <a:pPr algn="l">
-              <a:lnSpc>
-                <a:spcPts val="2400"/>
+                <a:spcPts val="1700"/>
               </a:lnSpc>
               <a:spcBef>
                 <a:spcPts val="0"/>
               </a:spcBef>
               <a:spcAft>
-                <a:spcPts val="800"/>
+                <a:spcPts val="0"/>
               </a:spcAft>
             </a:pPr>
             <a:r>
-              <a:rPr sz="1800" b="0" i="0">
+              <a:rPr sz="1300" b="0" i="0">
                 <a:solidFill>
                   <a:srgbClr val="1E293B"/>
                 </a:solidFill>
@@ -4833,31 +6963,764 @@
                 <a:ea typeface="Open Sans"/>
                 <a:cs typeface="Open Sans"/>
               </a:rPr>
-              <a:t>70,4% mulheres  ·  52,1% entre 18 e 24 anos  ·  45,1% com ensino superior incompleto.</a:t>
-            </a:r>
-          </a:p>
+              <a:t>Um encoder compartilhado extrai a expressão. Decoders separados trocam a identidade: o rosto de uma pessoa fica com o gesto da outra. A média dos pixels borra a textura.</a:t>
+            </a:r>
+          </a:p>
+        </p:txBody>
+      </p:sp>
+      <p:sp>
+        <p:nvSpPr>
+          <p:cNvPr id="38" name="Rectangle 37"/>
+          <p:cNvSpPr/>
+          <p:nvPr/>
+        </p:nvSpPr>
+        <p:spPr>
+          <a:xfrm>
+            <a:off x="500000" y="1580000"/>
+            <a:ext cx="3600000" cy="57150"/>
+          </a:xfrm>
+          <a:prstGeom prst="rect">
+            <a:avLst/>
+          </a:prstGeom>
+          <a:solidFill>
+            <a:srgbClr val="00C2CB"/>
+          </a:solidFill>
+          <a:ln>
+            <a:noFill/>
+          </a:ln>
+        </p:spPr>
+        <p:style>
+          <a:lnRef idx="1">
+            <a:schemeClr val="accent1"/>
+          </a:lnRef>
+          <a:fillRef idx="3">
+            <a:schemeClr val="accent1"/>
+          </a:fillRef>
+          <a:effectRef idx="2">
+            <a:schemeClr val="accent1"/>
+          </a:effectRef>
+          <a:fontRef idx="minor">
+            <a:schemeClr val="lt1"/>
+          </a:fontRef>
+        </p:style>
+        <p:txBody>
+          <a:bodyPr rtlCol="0" anchor="ctr"/>
+          <a:lstStyle/>
+          <a:p>
+            <a:pPr algn="ctr"/>
+          </a:p>
+        </p:txBody>
+      </p:sp>
+      <p:sp>
+        <p:nvSpPr>
+          <p:cNvPr id="39" name="Rounded Rectangle 38"/>
+          <p:cNvSpPr/>
+          <p:nvPr/>
+        </p:nvSpPr>
+        <p:spPr>
+          <a:xfrm>
+            <a:off x="4280000" y="1580000"/>
+            <a:ext cx="3600000" cy="2500000"/>
+          </a:xfrm>
+          <a:prstGeom prst="roundRect">
+            <a:avLst>
+              <a:gd name="adj" fmla="val 8000"/>
+            </a:avLst>
+          </a:prstGeom>
+          <a:solidFill>
+            <a:srgbClr val="F8FAFC"/>
+          </a:solidFill>
+          <a:ln w="12700">
+            <a:solidFill>
+              <a:srgbClr val="E2E8F0"/>
+            </a:solidFill>
+          </a:ln>
+        </p:spPr>
+        <p:style>
+          <a:lnRef idx="1">
+            <a:schemeClr val="accent1"/>
+          </a:lnRef>
+          <a:fillRef idx="3">
+            <a:schemeClr val="accent1"/>
+          </a:fillRef>
+          <a:effectRef idx="2">
+            <a:schemeClr val="accent1"/>
+          </a:effectRef>
+          <a:fontRef idx="minor">
+            <a:schemeClr val="lt1"/>
+          </a:fontRef>
+        </p:style>
+        <p:txBody>
+          <a:bodyPr rtlCol="0" anchor="ctr" wrap="square" lIns="120000" rIns="120000" tIns="140000"/>
+          <a:lstStyle/>
           <a:p>
             <a:pPr algn="l">
               <a:lnSpc>
-                <a:spcPts val="2100"/>
+                <a:spcPts val="2000"/>
               </a:lnSpc>
               <a:spcBef>
-                <a:spcPts val="600"/>
+                <a:spcPts val="200"/>
               </a:spcBef>
               <a:spcAft>
-                <a:spcPts val="400"/>
+                <a:spcPts val="600"/>
               </a:spcAft>
             </a:pPr>
             <a:r>
-              <a:rPr sz="1600" b="0" i="0">
-                <a:solidFill>
-                  <a:srgbClr val="475569"/>
+              <a:rPr sz="1600" b="1" i="0">
+                <a:solidFill>
+                  <a:srgbClr val="016F89"/>
+                </a:solidFill>
+                <a:latin typeface="Montserrat"/>
+                <a:ea typeface="Montserrat"/>
+                <a:cs typeface="Montserrat"/>
+              </a:rPr>
+              <a:t>GAN</a:t>
+            </a:r>
+          </a:p>
+          <a:p>
+            <a:pPr algn="l">
+              <a:lnSpc>
+                <a:spcPts val="1700"/>
+              </a:lnSpc>
+              <a:spcBef>
+                <a:spcPts val="0"/>
+              </a:spcBef>
+              <a:spcAft>
+                <a:spcPts val="0"/>
+              </a:spcAft>
+            </a:pPr>
+            <a:r>
+              <a:rPr sz="1300" b="0" i="0">
+                <a:solidFill>
+                  <a:srgbClr val="1E293B"/>
                 </a:solidFill>
                 <a:latin typeface="Open Sans"/>
                 <a:ea typeface="Open Sans"/>
                 <a:cs typeface="Open Sans"/>
               </a:rPr>
-              <a:t>A faixa de 13 a 17 anos é 7,0% da amostra (5 pessoas). Os impactos sobre a infância, mais adiante, vêm da literatura citada no relatório.</a:t>
+              <a:t>O gerador fabrica a mídia. O discriminador aponta o que ainda parece falso. A disputa entre os dois reduz o borrão que o autoencoder deixava.</a:t>
+            </a:r>
+          </a:p>
+        </p:txBody>
+      </p:sp>
+      <p:sp>
+        <p:nvSpPr>
+          <p:cNvPr id="40" name="Rectangle 39"/>
+          <p:cNvSpPr/>
+          <p:nvPr/>
+        </p:nvSpPr>
+        <p:spPr>
+          <a:xfrm>
+            <a:off x="4280000" y="1580000"/>
+            <a:ext cx="3600000" cy="57150"/>
+          </a:xfrm>
+          <a:prstGeom prst="rect">
+            <a:avLst/>
+          </a:prstGeom>
+          <a:solidFill>
+            <a:srgbClr val="00C2CB"/>
+          </a:solidFill>
+          <a:ln>
+            <a:noFill/>
+          </a:ln>
+        </p:spPr>
+        <p:style>
+          <a:lnRef idx="1">
+            <a:schemeClr val="accent1"/>
+          </a:lnRef>
+          <a:fillRef idx="3">
+            <a:schemeClr val="accent1"/>
+          </a:fillRef>
+          <a:effectRef idx="2">
+            <a:schemeClr val="accent1"/>
+          </a:effectRef>
+          <a:fontRef idx="minor">
+            <a:schemeClr val="lt1"/>
+          </a:fontRef>
+        </p:style>
+        <p:txBody>
+          <a:bodyPr rtlCol="0" anchor="ctr"/>
+          <a:lstStyle/>
+          <a:p>
+            <a:pPr algn="ctr"/>
+          </a:p>
+        </p:txBody>
+      </p:sp>
+      <p:sp>
+        <p:nvSpPr>
+          <p:cNvPr id="41" name="Rounded Rectangle 40"/>
+          <p:cNvSpPr/>
+          <p:nvPr/>
+        </p:nvSpPr>
+        <p:spPr>
+          <a:xfrm>
+            <a:off x="8060000" y="1580000"/>
+            <a:ext cx="3600000" cy="2500000"/>
+          </a:xfrm>
+          <a:prstGeom prst="roundRect">
+            <a:avLst>
+              <a:gd name="adj" fmla="val 8000"/>
+            </a:avLst>
+          </a:prstGeom>
+          <a:solidFill>
+            <a:srgbClr val="F8FAFC"/>
+          </a:solidFill>
+          <a:ln w="12700">
+            <a:solidFill>
+              <a:srgbClr val="E2E8F0"/>
+            </a:solidFill>
+          </a:ln>
+        </p:spPr>
+        <p:style>
+          <a:lnRef idx="1">
+            <a:schemeClr val="accent1"/>
+          </a:lnRef>
+          <a:fillRef idx="3">
+            <a:schemeClr val="accent1"/>
+          </a:fillRef>
+          <a:effectRef idx="2">
+            <a:schemeClr val="accent1"/>
+          </a:effectRef>
+          <a:fontRef idx="minor">
+            <a:schemeClr val="lt1"/>
+          </a:fontRef>
+        </p:style>
+        <p:txBody>
+          <a:bodyPr rtlCol="0" anchor="ctr" wrap="square" lIns="120000" rIns="120000" tIns="140000"/>
+          <a:lstStyle/>
+          <a:p>
+            <a:pPr algn="l">
+              <a:lnSpc>
+                <a:spcPts val="2000"/>
+              </a:lnSpc>
+              <a:spcBef>
+                <a:spcPts val="200"/>
+              </a:spcBef>
+              <a:spcAft>
+                <a:spcPts val="600"/>
+              </a:spcAft>
+            </a:pPr>
+            <a:r>
+              <a:rPr sz="1600" b="1" i="0">
+                <a:solidFill>
+                  <a:srgbClr val="016F89"/>
+                </a:solidFill>
+                <a:latin typeface="Montserrat"/>
+                <a:ea typeface="Montserrat"/>
+                <a:cs typeface="Montserrat"/>
+              </a:rPr>
+              <a:t>Difusão</a:t>
+            </a:r>
+          </a:p>
+          <a:p>
+            <a:pPr algn="l">
+              <a:lnSpc>
+                <a:spcPts val="1700"/>
+              </a:lnSpc>
+              <a:spcBef>
+                <a:spcPts val="0"/>
+              </a:spcBef>
+              <a:spcAft>
+                <a:spcPts val="0"/>
+              </a:spcAft>
+            </a:pPr>
+            <a:r>
+              <a:rPr sz="1300" b="0" i="0">
+                <a:solidFill>
+                  <a:srgbClr val="1E293B"/>
+                </a:solidFill>
+                <a:latin typeface="Open Sans"/>
+                <a:ea typeface="Open Sans"/>
+                <a:cs typeface="Open Sans"/>
+              </a:rPr>
+              <a:t>A imagem vira ruído e o modelo aprende o caminho de volta. Pela precisão, é a arquitetura mais usada hoje para deepfake.</a:t>
+            </a:r>
+          </a:p>
+        </p:txBody>
+      </p:sp>
+      <p:sp>
+        <p:nvSpPr>
+          <p:cNvPr id="42" name="Rectangle 41"/>
+          <p:cNvSpPr/>
+          <p:nvPr/>
+        </p:nvSpPr>
+        <p:spPr>
+          <a:xfrm>
+            <a:off x="8060000" y="1580000"/>
+            <a:ext cx="3600000" cy="57150"/>
+          </a:xfrm>
+          <a:prstGeom prst="rect">
+            <a:avLst/>
+          </a:prstGeom>
+          <a:solidFill>
+            <a:srgbClr val="00C2CB"/>
+          </a:solidFill>
+          <a:ln>
+            <a:noFill/>
+          </a:ln>
+        </p:spPr>
+        <p:style>
+          <a:lnRef idx="1">
+            <a:schemeClr val="accent1"/>
+          </a:lnRef>
+          <a:fillRef idx="3">
+            <a:schemeClr val="accent1"/>
+          </a:fillRef>
+          <a:effectRef idx="2">
+            <a:schemeClr val="accent1"/>
+          </a:effectRef>
+          <a:fontRef idx="minor">
+            <a:schemeClr val="lt1"/>
+          </a:fontRef>
+        </p:style>
+        <p:txBody>
+          <a:bodyPr rtlCol="0" anchor="ctr"/>
+          <a:lstStyle/>
+          <a:p>
+            <a:pPr algn="ctr"/>
+          </a:p>
+        </p:txBody>
+      </p:sp>
+      <p:sp>
+        <p:nvSpPr>
+          <p:cNvPr id="43" name="Rounded Rectangle 42"/>
+          <p:cNvSpPr/>
+          <p:nvPr/>
+        </p:nvSpPr>
+        <p:spPr>
+          <a:xfrm>
+            <a:off x="620000" y="4400000"/>
+            <a:ext cx="2500000" cy="460000"/>
+          </a:xfrm>
+          <a:prstGeom prst="roundRect">
+            <a:avLst>
+              <a:gd name="adj" fmla="val 50000"/>
+            </a:avLst>
+          </a:prstGeom>
+          <a:solidFill>
+            <a:srgbClr val="016F89"/>
+          </a:solidFill>
+          <a:ln>
+            <a:noFill/>
+          </a:ln>
+        </p:spPr>
+        <p:style>
+          <a:lnRef idx="1">
+            <a:schemeClr val="accent1"/>
+          </a:lnRef>
+          <a:fillRef idx="3">
+            <a:schemeClr val="accent1"/>
+          </a:fillRef>
+          <a:effectRef idx="2">
+            <a:schemeClr val="accent1"/>
+          </a:effectRef>
+          <a:fontRef idx="minor">
+            <a:schemeClr val="lt1"/>
+          </a:fontRef>
+        </p:style>
+        <p:txBody>
+          <a:bodyPr rtlCol="0" anchor="ctr" wrap="square"/>
+          <a:lstStyle/>
+          <a:p>
+            <a:pPr algn="ctr">
+              <a:lnSpc>
+                <a:spcPts val="1500"/>
+              </a:lnSpc>
+              <a:spcBef>
+                <a:spcPts val="0"/>
+              </a:spcBef>
+              <a:spcAft>
+                <a:spcPts val="0"/>
+              </a:spcAft>
+            </a:pPr>
+            <a:r>
+              <a:rPr sz="1200" b="1" i="0">
+                <a:solidFill>
+                  <a:srgbClr val="FFFFFF"/>
+                </a:solidFill>
+                <a:latin typeface="Montserrat"/>
+                <a:ea typeface="Montserrat"/>
+                <a:cs typeface="Montserrat"/>
+              </a:rPr>
+              <a:t>Propagação</a:t>
+            </a:r>
+          </a:p>
+        </p:txBody>
+      </p:sp>
+      <p:sp>
+        <p:nvSpPr>
+          <p:cNvPr id="44" name="TextBox 43"/>
+          <p:cNvSpPr txBox="1"/>
+          <p:nvPr/>
+        </p:nvSpPr>
+        <p:spPr>
+          <a:xfrm>
+            <a:off x="3080000" y="4460000"/>
+            <a:ext cx="360000" cy="340000"/>
+          </a:xfrm>
+          <a:prstGeom prst="rect">
+            <a:avLst/>
+          </a:prstGeom>
+          <a:noFill/>
+        </p:spPr>
+        <p:txBody>
+          <a:bodyPr wrap="square" anchor="ctr"/>
+          <a:lstStyle/>
+          <a:p>
+            <a:pPr algn="ctr">
+              <a:lnSpc>
+                <a:spcPts val="2200"/>
+              </a:lnSpc>
+              <a:spcBef>
+                <a:spcPts val="0"/>
+              </a:spcBef>
+              <a:spcAft>
+                <a:spcPts val="0"/>
+              </a:spcAft>
+            </a:pPr>
+            <a:r>
+              <a:rPr sz="2200" b="1" i="0">
+                <a:solidFill>
+                  <a:srgbClr val="016F89"/>
+                </a:solidFill>
+                <a:latin typeface="Montserrat"/>
+                <a:ea typeface="Montserrat"/>
+                <a:cs typeface="Montserrat"/>
+              </a:rPr>
+              <a:t>›</a:t>
+            </a:r>
+          </a:p>
+        </p:txBody>
+      </p:sp>
+      <p:sp>
+        <p:nvSpPr>
+          <p:cNvPr id="45" name="Rounded Rectangle 44"/>
+          <p:cNvSpPr/>
+          <p:nvPr/>
+        </p:nvSpPr>
+        <p:spPr>
+          <a:xfrm>
+            <a:off x="3400000" y="4400000"/>
+            <a:ext cx="2500000" cy="460000"/>
+          </a:xfrm>
+          <a:prstGeom prst="roundRect">
+            <a:avLst>
+              <a:gd name="adj" fmla="val 50000"/>
+            </a:avLst>
+          </a:prstGeom>
+          <a:solidFill>
+            <a:srgbClr val="016F89"/>
+          </a:solidFill>
+          <a:ln>
+            <a:noFill/>
+          </a:ln>
+        </p:spPr>
+        <p:style>
+          <a:lnRef idx="1">
+            <a:schemeClr val="accent1"/>
+          </a:lnRef>
+          <a:fillRef idx="3">
+            <a:schemeClr val="accent1"/>
+          </a:fillRef>
+          <a:effectRef idx="2">
+            <a:schemeClr val="accent1"/>
+          </a:effectRef>
+          <a:fontRef idx="minor">
+            <a:schemeClr val="lt1"/>
+          </a:fontRef>
+        </p:style>
+        <p:txBody>
+          <a:bodyPr rtlCol="0" anchor="ctr" wrap="square"/>
+          <a:lstStyle/>
+          <a:p>
+            <a:pPr algn="ctr">
+              <a:lnSpc>
+                <a:spcPts val="1500"/>
+              </a:lnSpc>
+              <a:spcBef>
+                <a:spcPts val="0"/>
+              </a:spcBef>
+              <a:spcAft>
+                <a:spcPts val="0"/>
+              </a:spcAft>
+            </a:pPr>
+            <a:r>
+              <a:rPr sz="1200" b="1" i="0">
+                <a:solidFill>
+                  <a:srgbClr val="FFFFFF"/>
+                </a:solidFill>
+                <a:latin typeface="Montserrat"/>
+                <a:ea typeface="Montserrat"/>
+                <a:cs typeface="Montserrat"/>
+              </a:rPr>
+              <a:t>Perda (MSE)</a:t>
+            </a:r>
+          </a:p>
+        </p:txBody>
+      </p:sp>
+      <p:sp>
+        <p:nvSpPr>
+          <p:cNvPr id="46" name="TextBox 45"/>
+          <p:cNvSpPr txBox="1"/>
+          <p:nvPr/>
+        </p:nvSpPr>
+        <p:spPr>
+          <a:xfrm>
+            <a:off x="5860000" y="4460000"/>
+            <a:ext cx="360000" cy="340000"/>
+          </a:xfrm>
+          <a:prstGeom prst="rect">
+            <a:avLst/>
+          </a:prstGeom>
+          <a:noFill/>
+        </p:spPr>
+        <p:txBody>
+          <a:bodyPr wrap="square" anchor="ctr"/>
+          <a:lstStyle/>
+          <a:p>
+            <a:pPr algn="ctr">
+              <a:lnSpc>
+                <a:spcPts val="2200"/>
+              </a:lnSpc>
+              <a:spcBef>
+                <a:spcPts val="0"/>
+              </a:spcBef>
+              <a:spcAft>
+                <a:spcPts val="0"/>
+              </a:spcAft>
+            </a:pPr>
+            <a:r>
+              <a:rPr sz="2200" b="1" i="0">
+                <a:solidFill>
+                  <a:srgbClr val="016F89"/>
+                </a:solidFill>
+                <a:latin typeface="Montserrat"/>
+                <a:ea typeface="Montserrat"/>
+                <a:cs typeface="Montserrat"/>
+              </a:rPr>
+              <a:t>›</a:t>
+            </a:r>
+          </a:p>
+        </p:txBody>
+      </p:sp>
+      <p:sp>
+        <p:nvSpPr>
+          <p:cNvPr id="47" name="Rounded Rectangle 46"/>
+          <p:cNvSpPr/>
+          <p:nvPr/>
+        </p:nvSpPr>
+        <p:spPr>
+          <a:xfrm>
+            <a:off x="6180000" y="4400000"/>
+            <a:ext cx="2500000" cy="460000"/>
+          </a:xfrm>
+          <a:prstGeom prst="roundRect">
+            <a:avLst>
+              <a:gd name="adj" fmla="val 50000"/>
+            </a:avLst>
+          </a:prstGeom>
+          <a:solidFill>
+            <a:srgbClr val="016F89"/>
+          </a:solidFill>
+          <a:ln>
+            <a:noFill/>
+          </a:ln>
+        </p:spPr>
+        <p:style>
+          <a:lnRef idx="1">
+            <a:schemeClr val="accent1"/>
+          </a:lnRef>
+          <a:fillRef idx="3">
+            <a:schemeClr val="accent1"/>
+          </a:fillRef>
+          <a:effectRef idx="2">
+            <a:schemeClr val="accent1"/>
+          </a:effectRef>
+          <a:fontRef idx="minor">
+            <a:schemeClr val="lt1"/>
+          </a:fontRef>
+        </p:style>
+        <p:txBody>
+          <a:bodyPr rtlCol="0" anchor="ctr" wrap="square"/>
+          <a:lstStyle/>
+          <a:p>
+            <a:pPr algn="ctr">
+              <a:lnSpc>
+                <a:spcPts val="1500"/>
+              </a:lnSpc>
+              <a:spcBef>
+                <a:spcPts val="0"/>
+              </a:spcBef>
+              <a:spcAft>
+                <a:spcPts val="0"/>
+              </a:spcAft>
+            </a:pPr>
+            <a:r>
+              <a:rPr sz="1200" b="1" i="0">
+                <a:solidFill>
+                  <a:srgbClr val="FFFFFF"/>
+                </a:solidFill>
+                <a:latin typeface="Montserrat"/>
+                <a:ea typeface="Montserrat"/>
+                <a:cs typeface="Montserrat"/>
+              </a:rPr>
+              <a:t>Retropropagação</a:t>
+            </a:r>
+          </a:p>
+        </p:txBody>
+      </p:sp>
+      <p:sp>
+        <p:nvSpPr>
+          <p:cNvPr id="48" name="TextBox 47"/>
+          <p:cNvSpPr txBox="1"/>
+          <p:nvPr/>
+        </p:nvSpPr>
+        <p:spPr>
+          <a:xfrm>
+            <a:off x="8640000" y="4460000"/>
+            <a:ext cx="360000" cy="340000"/>
+          </a:xfrm>
+          <a:prstGeom prst="rect">
+            <a:avLst/>
+          </a:prstGeom>
+          <a:noFill/>
+        </p:spPr>
+        <p:txBody>
+          <a:bodyPr wrap="square" anchor="ctr"/>
+          <a:lstStyle/>
+          <a:p>
+            <a:pPr algn="ctr">
+              <a:lnSpc>
+                <a:spcPts val="2200"/>
+              </a:lnSpc>
+              <a:spcBef>
+                <a:spcPts val="0"/>
+              </a:spcBef>
+              <a:spcAft>
+                <a:spcPts val="0"/>
+              </a:spcAft>
+            </a:pPr>
+            <a:r>
+              <a:rPr sz="2200" b="1" i="0">
+                <a:solidFill>
+                  <a:srgbClr val="016F89"/>
+                </a:solidFill>
+                <a:latin typeface="Montserrat"/>
+                <a:ea typeface="Montserrat"/>
+                <a:cs typeface="Montserrat"/>
+              </a:rPr>
+              <a:t>›</a:t>
+            </a:r>
+          </a:p>
+        </p:txBody>
+      </p:sp>
+      <p:sp>
+        <p:nvSpPr>
+          <p:cNvPr id="49" name="Rounded Rectangle 48"/>
+          <p:cNvSpPr/>
+          <p:nvPr/>
+        </p:nvSpPr>
+        <p:spPr>
+          <a:xfrm>
+            <a:off x="8960000" y="4400000"/>
+            <a:ext cx="2500000" cy="460000"/>
+          </a:xfrm>
+          <a:prstGeom prst="roundRect">
+            <a:avLst>
+              <a:gd name="adj" fmla="val 50000"/>
+            </a:avLst>
+          </a:prstGeom>
+          <a:solidFill>
+            <a:srgbClr val="016F89"/>
+          </a:solidFill>
+          <a:ln>
+            <a:noFill/>
+          </a:ln>
+        </p:spPr>
+        <p:style>
+          <a:lnRef idx="1">
+            <a:schemeClr val="accent1"/>
+          </a:lnRef>
+          <a:fillRef idx="3">
+            <a:schemeClr val="accent1"/>
+          </a:fillRef>
+          <a:effectRef idx="2">
+            <a:schemeClr val="accent1"/>
+          </a:effectRef>
+          <a:fontRef idx="minor">
+            <a:schemeClr val="lt1"/>
+          </a:fontRef>
+        </p:style>
+        <p:txBody>
+          <a:bodyPr rtlCol="0" anchor="ctr" wrap="square"/>
+          <a:lstStyle/>
+          <a:p>
+            <a:pPr algn="ctr">
+              <a:lnSpc>
+                <a:spcPts val="1500"/>
+              </a:lnSpc>
+              <a:spcBef>
+                <a:spcPts val="0"/>
+              </a:spcBef>
+              <a:spcAft>
+                <a:spcPts val="0"/>
+              </a:spcAft>
+            </a:pPr>
+            <a:r>
+              <a:rPr sz="1200" b="1" i="0">
+                <a:solidFill>
+                  <a:srgbClr val="FFFFFF"/>
+                </a:solidFill>
+                <a:latin typeface="Montserrat"/>
+                <a:ea typeface="Montserrat"/>
+                <a:cs typeface="Montserrat"/>
+              </a:rPr>
+              <a:t>Gradiente descendente</a:t>
+            </a:r>
+          </a:p>
+        </p:txBody>
+      </p:sp>
+      <p:sp>
+        <p:nvSpPr>
+          <p:cNvPr id="50" name="TextBox 49"/>
+          <p:cNvSpPr txBox="1"/>
+          <p:nvPr/>
+        </p:nvSpPr>
+        <p:spPr>
+          <a:xfrm>
+            <a:off x="502920" y="5000000"/>
+            <a:ext cx="11100000" cy="900000"/>
+          </a:xfrm>
+          <a:prstGeom prst="rect">
+            <a:avLst/>
+          </a:prstGeom>
+          <a:noFill/>
+        </p:spPr>
+        <p:txBody>
+          <a:bodyPr wrap="square" anchor="t"/>
+          <a:lstStyle/>
+          <a:p>
+            <a:pPr algn="l">
+              <a:lnSpc>
+                <a:spcPts val="1800"/>
+              </a:lnSpc>
+              <a:spcBef>
+                <a:spcPts val="400"/>
+              </a:spcBef>
+              <a:spcAft>
+                <a:spcPts val="200"/>
+              </a:spcAft>
+            </a:pPr>
+            <a:r>
+              <a:rPr sz="1400" b="0" i="0">
+                <a:solidFill>
+                  <a:srgbClr val="475569"/>
+                </a:solidFill>
+                <a:latin typeface="Open Sans"/>
+                <a:ea typeface="Open Sans"/>
+                <a:cs typeface="Open Sans"/>
+              </a:rPr>
+              <a:t>O ciclo recomeça com pesos aleatórios e se repete milhares de vezes, até o erro se aproximar de zero. É esse loop que torna a mídia convincente.</a:t>
             </a:r>
           </a:p>
         </p:txBody>
@@ -5476,7 +8339,7 @@
                 <a:ea typeface="Montserrat"/>
                 <a:cs typeface="Montserrat"/>
               </a:rPr>
-              <a:t>3. Resultados</a:t>
+              <a:t>3. O acesso ficou fácil</a:t>
             </a:r>
           </a:p>
         </p:txBody>
@@ -5653,7 +8516,7 @@
         <p:spPr>
           <a:xfrm>
             <a:off x="502920" y="980000"/>
-            <a:ext cx="11186000" cy="5250000"/>
+            <a:ext cx="11100000" cy="5200000"/>
           </a:xfrm>
           <a:prstGeom prst="rect">
             <a:avLst/>
@@ -5661,18 +8524,18 @@
           <a:noFill/>
         </p:spPr>
         <p:txBody>
-          <a:bodyPr wrap="square"/>
+          <a:bodyPr wrap="square" anchor="t"/>
           <a:lstStyle/>
           <a:p>
             <a:pPr algn="l">
               <a:lnSpc>
-                <a:spcPts val="2600"/>
+                <a:spcPts val="2400"/>
               </a:lnSpc>
               <a:spcBef>
                 <a:spcPts val="0"/>
               </a:spcBef>
               <a:spcAft>
-                <a:spcPts val="800"/>
+                <a:spcPts val="600"/>
               </a:spcAft>
             </a:pPr>
             <a:r>
@@ -5684,195 +8547,243 @@
                 <a:ea typeface="Montserrat"/>
                 <a:cs typeface="Montserrat"/>
               </a:rPr>
-              <a:t>Conhecer o termo não é saber se defender</a:t>
+              <a:t>Da especialização ao plug-and-play</a:t>
             </a:r>
           </a:p>
           <a:p>
             <a:pPr algn="l">
               <a:lnSpc>
-                <a:spcPts val="2100"/>
+                <a:spcPts val="2200"/>
               </a:lnSpc>
               <a:spcBef>
-                <a:spcPts val="600"/>
+                <a:spcPts val="0"/>
               </a:spcBef>
               <a:spcAft>
-                <a:spcPts val="400"/>
+                <a:spcPts val="600"/>
               </a:spcAft>
             </a:pPr>
             <a:r>
-              <a:rPr sz="1600" b="0" i="0">
-                <a:solidFill>
-                  <a:srgbClr val="475569"/>
+              <a:rPr sz="1700" b="0" i="0">
+                <a:solidFill>
+                  <a:srgbClr val="1E293B"/>
                 </a:solidFill>
                 <a:latin typeface="Open Sans"/>
                 <a:ea typeface="Open Sans"/>
                 <a:cs typeface="Open Sans"/>
               </a:rPr>
-              <a:t>N = 71</a:t>
+              <a:t>O que exigia semanas de trabalho técnico virou aplicativo gratuito e alguns minutos. O modelo atual não precisa mais ser treinado para cada pessoa.</a:t>
             </a:r>
           </a:p>
           <a:p>
             <a:pPr algn="l">
               <a:lnSpc>
-                <a:spcPts val="3200"/>
+                <a:spcPts val="2400"/>
               </a:lnSpc>
               <a:spcBef>
-                <a:spcPts val="200"/>
+                <a:spcPts val="1200"/>
+              </a:spcBef>
+              <a:spcAft>
+                <a:spcPts val="600"/>
+              </a:spcAft>
+            </a:pPr>
+            <a:r>
+              <a:rPr sz="2000" b="1" i="0">
+                <a:solidFill>
+                  <a:srgbClr val="016F89"/>
+                </a:solidFill>
+                <a:latin typeface="Montserrat"/>
+                <a:ea typeface="Montserrat"/>
+                <a:cs typeface="Montserrat"/>
+              </a:rPr>
+              <a:t>Como o conteúdo se espalha</a:t>
+            </a:r>
+          </a:p>
+          <a:p>
+            <a:pPr algn="l">
+              <a:lnSpc>
+                <a:spcPts val="2200"/>
+              </a:lnSpc>
+              <a:spcBef>
+                <a:spcPts val="100"/>
+              </a:spcBef>
+              <a:spcAft>
+                <a:spcPts val="300"/>
+              </a:spcAft>
+            </a:pPr>
+            <a:r>
+              <a:rPr sz="1700" b="1" i="0">
+                <a:solidFill>
+                  <a:srgbClr val="016F89"/>
+                </a:solidFill>
+                <a:latin typeface="Open Sans"/>
+                <a:ea typeface="Open Sans"/>
+                <a:cs typeface="Open Sans"/>
+              </a:rPr>
+              <a:t>•  </a:t>
+            </a:r>
+            <a:r>
+              <a:rPr sz="1700" b="0" i="0">
+                <a:solidFill>
+                  <a:srgbClr val="1E293B"/>
+                </a:solidFill>
+                <a:latin typeface="Open Sans"/>
+                <a:ea typeface="Open Sans"/>
+                <a:cs typeface="Open Sans"/>
+              </a:rPr>
+              <a:t>A rede encurta o intervalo entre criar e circular a mídia.</a:t>
+            </a:r>
+          </a:p>
+          <a:p>
+            <a:pPr algn="l">
+              <a:lnSpc>
+                <a:spcPts val="2200"/>
+              </a:lnSpc>
+              <a:spcBef>
+                <a:spcPts val="100"/>
+              </a:spcBef>
+              <a:spcAft>
+                <a:spcPts val="300"/>
+              </a:spcAft>
+            </a:pPr>
+            <a:r>
+              <a:rPr sz="1700" b="1" i="0">
+                <a:solidFill>
+                  <a:srgbClr val="016F89"/>
+                </a:solidFill>
+                <a:latin typeface="Open Sans"/>
+                <a:ea typeface="Open Sans"/>
+                <a:cs typeface="Open Sans"/>
+              </a:rPr>
+              <a:t>•  </a:t>
+            </a:r>
+            <a:r>
+              <a:rPr sz="1700" b="0" i="0">
+                <a:solidFill>
+                  <a:srgbClr val="1E293B"/>
+                </a:solidFill>
+                <a:latin typeface="Open Sans"/>
+                <a:ea typeface="Open Sans"/>
+                <a:cs typeface="Open Sans"/>
+              </a:rPr>
+              <a:t>Mensagens e redes sociais divulgam rápido e dificultam a contenção depois da primeira partilha.</a:t>
+            </a:r>
+          </a:p>
+          <a:p>
+            <a:pPr algn="l">
+              <a:lnSpc>
+                <a:spcPts val="2400"/>
+              </a:lnSpc>
+              <a:spcBef>
+                <a:spcPts val="1200"/>
+              </a:spcBef>
+              <a:spcAft>
+                <a:spcPts val="600"/>
+              </a:spcAft>
+            </a:pPr>
+            <a:r>
+              <a:rPr sz="2000" b="1" i="0">
+                <a:solidFill>
+                  <a:srgbClr val="016F89"/>
+                </a:solidFill>
+                <a:latin typeface="Montserrat"/>
+                <a:ea typeface="Montserrat"/>
+                <a:cs typeface="Montserrat"/>
+              </a:rPr>
+              <a:t>O jovem já está dentro desse ambiente</a:t>
+            </a:r>
+          </a:p>
+          <a:p>
+            <a:pPr algn="l">
+              <a:lnSpc>
+                <a:spcPts val="2200"/>
+              </a:lnSpc>
+              <a:spcBef>
+                <a:spcPts val="100"/>
+              </a:spcBef>
+              <a:spcAft>
+                <a:spcPts val="300"/>
+              </a:spcAft>
+            </a:pPr>
+            <a:r>
+              <a:rPr sz="1700" b="1" i="0">
+                <a:solidFill>
+                  <a:srgbClr val="016F89"/>
+                </a:solidFill>
+                <a:latin typeface="Open Sans"/>
+                <a:ea typeface="Open Sans"/>
+                <a:cs typeface="Open Sans"/>
+              </a:rPr>
+              <a:t>•  </a:t>
+            </a:r>
+            <a:r>
+              <a:rPr sz="1700" b="0" i="0">
+                <a:solidFill>
+                  <a:srgbClr val="1E293B"/>
+                </a:solidFill>
+                <a:latin typeface="Open Sans"/>
+                <a:ea typeface="Open Sans"/>
+                <a:cs typeface="Open Sans"/>
+              </a:rPr>
+              <a:t>TIC Kids Online 2025: quase dois terços dos usuários de 9 a 17 anos já usam IA. A principal finalidade é a escola (59%); cerca de 10% usam para questões pessoais.</a:t>
+            </a:r>
+          </a:p>
+          <a:p>
+            <a:pPr algn="l">
+              <a:lnSpc>
+                <a:spcPts val="2200"/>
+              </a:lnSpc>
+              <a:spcBef>
+                <a:spcPts val="100"/>
+              </a:spcBef>
+              <a:spcAft>
+                <a:spcPts val="300"/>
+              </a:spcAft>
+            </a:pPr>
+            <a:r>
+              <a:rPr sz="1700" b="1" i="0">
+                <a:solidFill>
+                  <a:srgbClr val="016F89"/>
+                </a:solidFill>
+                <a:latin typeface="Open Sans"/>
+                <a:ea typeface="Open Sans"/>
+                <a:cs typeface="Open Sans"/>
+              </a:rPr>
+              <a:t>•  </a:t>
+            </a:r>
+            <a:r>
+              <a:rPr sz="1700" b="0" i="0">
+                <a:solidFill>
+                  <a:srgbClr val="1E293B"/>
+                </a:solidFill>
+                <a:latin typeface="Open Sans"/>
+                <a:ea typeface="Open Sans"/>
+                <a:cs typeface="Open Sans"/>
+              </a:rPr>
+              <a:t>Unicef (2026): cerca de dois terços das crianças temem que a IA falsifique fotos ou vídeos de cunho sexual contra elas.</a:t>
+            </a:r>
+          </a:p>
+          <a:p>
+            <a:pPr algn="l">
+              <a:lnSpc>
+                <a:spcPts val="1800"/>
+              </a:lnSpc>
+              <a:spcBef>
+                <a:spcPts val="400"/>
               </a:spcBef>
               <a:spcAft>
                 <a:spcPts val="200"/>
               </a:spcAft>
             </a:pPr>
             <a:r>
-              <a:rPr sz="2800" b="1" i="0">
-                <a:solidFill>
-                  <a:srgbClr val="016F89"/>
-                </a:solidFill>
-                <a:latin typeface="Montserrat"/>
-                <a:ea typeface="Montserrat"/>
-                <a:cs typeface="Montserrat"/>
-              </a:rPr>
-              <a:t>81,7%</a:t>
-            </a:r>
-            <a:r>
-              <a:rPr sz="1800" b="0" i="0">
-                <a:solidFill>
-                  <a:srgbClr val="1E293B"/>
+              <a:rPr sz="1400" b="0" i="0">
+                <a:solidFill>
+                  <a:srgbClr val="475569"/>
                 </a:solidFill>
                 <a:latin typeface="Open Sans"/>
                 <a:ea typeface="Open Sans"/>
                 <a:cs typeface="Open Sans"/>
               </a:rPr>
-              <a:t>   conhecem o termo deepfake (58 pessoas)</a:t>
-            </a:r>
-          </a:p>
-          <a:p>
-            <a:pPr algn="l">
-              <a:lnSpc>
-                <a:spcPts val="3200"/>
-              </a:lnSpc>
-              <a:spcBef>
-                <a:spcPts val="200"/>
-              </a:spcBef>
-              <a:spcAft>
-                <a:spcPts val="200"/>
-              </a:spcAft>
-            </a:pPr>
-            <a:r>
-              <a:rPr sz="2800" b="1" i="0">
-                <a:solidFill>
-                  <a:srgbClr val="016F89"/>
-                </a:solidFill>
-                <a:latin typeface="Montserrat"/>
-                <a:ea typeface="Montserrat"/>
-                <a:cs typeface="Montserrat"/>
-              </a:rPr>
-              <a:t>76,1%</a:t>
-            </a:r>
-            <a:r>
-              <a:rPr sz="1800" b="0" i="0">
-                <a:solidFill>
-                  <a:srgbClr val="1E293B"/>
-                </a:solidFill>
-                <a:latin typeface="Open Sans"/>
-                <a:ea typeface="Open Sans"/>
-                <a:cs typeface="Open Sans"/>
-              </a:rPr>
-              <a:t>   conhecem o termo inteligência artificial (54)</a:t>
-            </a:r>
-          </a:p>
-          <a:p>
-            <a:pPr algn="l">
-              <a:lnSpc>
-                <a:spcPts val="3200"/>
-              </a:lnSpc>
-              <a:spcBef>
-                <a:spcPts val="200"/>
-              </a:spcBef>
-              <a:spcAft>
-                <a:spcPts val="200"/>
-              </a:spcAft>
-            </a:pPr>
-            <a:r>
-              <a:rPr sz="2800" b="1" i="0">
-                <a:solidFill>
-                  <a:srgbClr val="016F89"/>
-                </a:solidFill>
-                <a:latin typeface="Montserrat"/>
-                <a:ea typeface="Montserrat"/>
-                <a:cs typeface="Montserrat"/>
-              </a:rPr>
-              <a:t>57,7%</a:t>
-            </a:r>
-            <a:r>
-              <a:rPr sz="1800" b="0" i="0">
-                <a:solidFill>
-                  <a:srgbClr val="1E293B"/>
-                </a:solidFill>
-                <a:latin typeface="Open Sans"/>
-                <a:ea typeface="Open Sans"/>
-                <a:cs typeface="Open Sans"/>
-              </a:rPr>
-              <a:t>   não conhecem ferramenta de detecção (41)</a:t>
-            </a:r>
-          </a:p>
-          <a:p>
-            <a:pPr algn="l">
-              <a:lnSpc>
-                <a:spcPts val="3200"/>
-              </a:lnSpc>
-              <a:spcBef>
-                <a:spcPts val="200"/>
-              </a:spcBef>
-              <a:spcAft>
-                <a:spcPts val="200"/>
-              </a:spcAft>
-            </a:pPr>
-            <a:r>
-              <a:rPr sz="2800" b="1" i="0">
-                <a:solidFill>
-                  <a:srgbClr val="016F89"/>
-                </a:solidFill>
-                <a:latin typeface="Montserrat"/>
-                <a:ea typeface="Montserrat"/>
-                <a:cs typeface="Montserrat"/>
-              </a:rPr>
-              <a:t>42,3%</a:t>
-            </a:r>
-            <a:r>
-              <a:rPr sz="1800" b="0" i="0">
-                <a:solidFill>
-                  <a:srgbClr val="1E293B"/>
-                </a:solidFill>
-                <a:latin typeface="Open Sans"/>
-                <a:ea typeface="Open Sans"/>
-                <a:cs typeface="Open Sans"/>
-              </a:rPr>
-              <a:t>   sabem verificar se uma mídia é falsa (30)</a:t>
-            </a:r>
-          </a:p>
-          <a:p>
-            <a:pPr algn="l">
-              <a:lnSpc>
-                <a:spcPts val="2100"/>
-              </a:lnSpc>
-              <a:spcBef>
-                <a:spcPts val="600"/>
-              </a:spcBef>
-              <a:spcAft>
-                <a:spcPts val="400"/>
-              </a:spcAft>
-            </a:pPr>
-            <a:r>
-              <a:rPr sz="1600" b="0" i="0">
-                <a:solidFill>
-                  <a:srgbClr val="475569"/>
-                </a:solidFill>
-                <a:latin typeface="Open Sans"/>
-                <a:ea typeface="Open Sans"/>
-                <a:cs typeface="Open Sans"/>
-              </a:rPr>
-              <a:t>São quase 40 pontos percentuais entre “já ouvi falar” e “sei checar”.</a:t>
+              <a:t>Habilidade para operar o aplicativo não é a mesma coisa que prever a consequência ética e legal.</a:t>
             </a:r>
           </a:p>
         </p:txBody>
@@ -6123,7 +9034,7 @@
                 <a:ea typeface="Montserrat"/>
                 <a:cs typeface="Montserrat"/>
               </a:rPr>
-              <a:t>4. Problemas encontrados</a:t>
+              <a:t>4. Amostra</a:t>
             </a:r>
           </a:p>
         </p:txBody>
@@ -6299,8 +9210,8 @@
         </p:nvSpPr>
         <p:spPr>
           <a:xfrm>
-            <a:off x="502920" y="980000"/>
-            <a:ext cx="11186000" cy="5250000"/>
+            <a:off x="502920" y="900000"/>
+            <a:ext cx="11100000" cy="520000"/>
           </a:xfrm>
           <a:prstGeom prst="rect">
             <a:avLst/>
@@ -6308,301 +9219,111 @@
           <a:noFill/>
         </p:spPr>
         <p:txBody>
-          <a:bodyPr wrap="square"/>
+          <a:bodyPr wrap="square" anchor="t"/>
           <a:lstStyle/>
           <a:p>
             <a:pPr algn="l">
               <a:lnSpc>
-                <a:spcPts val="3200"/>
+                <a:spcPts val="2200"/>
               </a:lnSpc>
               <a:spcBef>
-                <a:spcPts val="200"/>
+                <a:spcPts val="0"/>
+              </a:spcBef>
+              <a:spcAft>
+                <a:spcPts val="600"/>
+              </a:spcAft>
+            </a:pPr>
+            <a:r>
+              <a:rPr sz="1700" b="0" i="0">
+                <a:solidFill>
+                  <a:srgbClr val="1E293B"/>
+                </a:solidFill>
+                <a:latin typeface="Open Sans"/>
+                <a:ea typeface="Open Sans"/>
+                <a:cs typeface="Open Sans"/>
+              </a:rPr>
+              <a:t>71 respostas válidas, em sua maioria no Rio de Janeiro. Frequências, qui-quadrado e teste exato de Fisher (p &lt; 0,05).</a:t>
+            </a:r>
+          </a:p>
+        </p:txBody>
+      </p:sp>
+      <p:graphicFrame>
+        <p:nvGraphicFramePr>
+          <p:cNvPr id="37" name="Chart 36"/>
+          <p:cNvGraphicFramePr>
+            <a:graphicFrameLocks noGrp="1"/>
+          </p:cNvGraphicFramePr>
+          <p:nvPr/>
+        </p:nvGraphicFramePr>
+        <p:xfrm>
+          <a:off x="350000" y="1480000"/>
+          <a:ext cx="5600000" cy="3900000"/>
+        </p:xfrm>
+        <a:graphic>
+          <a:graphicData uri="http://schemas.openxmlformats.org/drawingml/2006/chart">
+            <c:chart xmlns:c="http://schemas.openxmlformats.org/drawingml/2006/chart" r:id="rId3"/>
+          </a:graphicData>
+        </a:graphic>
+      </p:graphicFrame>
+      <p:graphicFrame>
+        <p:nvGraphicFramePr>
+          <p:cNvPr id="38" name="Chart 37"/>
+          <p:cNvGraphicFramePr>
+            <a:graphicFrameLocks noGrp="1"/>
+          </p:cNvGraphicFramePr>
+          <p:nvPr/>
+        </p:nvGraphicFramePr>
+        <p:xfrm>
+          <a:off x="6100000" y="1480000"/>
+          <a:ext cx="5700000" cy="3900000"/>
+        </p:xfrm>
+        <a:graphic>
+          <a:graphicData uri="http://schemas.openxmlformats.org/drawingml/2006/chart">
+            <c:chart xmlns:c="http://schemas.openxmlformats.org/drawingml/2006/chart" r:id="rId4"/>
+          </a:graphicData>
+        </a:graphic>
+      </p:graphicFrame>
+      <p:sp>
+        <p:nvSpPr>
+          <p:cNvPr id="39" name="TextBox 38"/>
+          <p:cNvSpPr txBox="1"/>
+          <p:nvPr/>
+        </p:nvSpPr>
+        <p:spPr>
+          <a:xfrm>
+            <a:off x="502920" y="5480000"/>
+            <a:ext cx="11100000" cy="800000"/>
+          </a:xfrm>
+          <a:prstGeom prst="rect">
+            <a:avLst/>
+          </a:prstGeom>
+          <a:noFill/>
+        </p:spPr>
+        <p:txBody>
+          <a:bodyPr wrap="square" anchor="t"/>
+          <a:lstStyle/>
+          <a:p>
+            <a:pPr algn="l">
+              <a:lnSpc>
+                <a:spcPts val="1800"/>
+              </a:lnSpc>
+              <a:spcBef>
+                <a:spcPts val="400"/>
               </a:spcBef>
               <a:spcAft>
                 <a:spcPts val="200"/>
               </a:spcAft>
             </a:pPr>
             <a:r>
-              <a:rPr sz="2800" b="1" i="0">
-                <a:solidFill>
-                  <a:srgbClr val="016F89"/>
-                </a:solidFill>
-                <a:latin typeface="Montserrat"/>
-                <a:ea typeface="Montserrat"/>
-                <a:cs typeface="Montserrat"/>
-              </a:rPr>
-              <a:t>40,8%</a:t>
-            </a:r>
-            <a:r>
-              <a:rPr sz="1800" b="0" i="0">
-                <a:solidFill>
-                  <a:srgbClr val="1E293B"/>
+              <a:rPr sz="1400" b="0" i="0">
+                <a:solidFill>
+                  <a:srgbClr val="475569"/>
                 </a:solidFill>
                 <a:latin typeface="Open Sans"/>
                 <a:ea typeface="Open Sans"/>
                 <a:cs typeface="Open Sans"/>
               </a:rPr>
-              <a:t>   já sofreram um ataque ou conhecem uma vítima (29 de 71)</a:t>
-            </a:r>
-          </a:p>
-          <a:p>
-            <a:pPr algn="l">
-              <a:lnSpc>
-                <a:spcPts val="2600"/>
-              </a:lnSpc>
-              <a:spcBef>
-                <a:spcPts val="1400"/>
-              </a:spcBef>
-              <a:spcAft>
-                <a:spcPts val="800"/>
-              </a:spcAft>
-            </a:pPr>
-            <a:r>
-              <a:rPr sz="2000" b="1" i="0">
-                <a:solidFill>
-                  <a:srgbClr val="016F89"/>
-                </a:solidFill>
-                <a:latin typeface="Montserrat"/>
-                <a:ea typeface="Montserrat"/>
-                <a:cs typeface="Montserrat"/>
-              </a:rPr>
-              <a:t>Reação nesses 29 casos</a:t>
-            </a:r>
-          </a:p>
-          <a:p>
-            <a:pPr algn="l">
-              <a:lnSpc>
-                <a:spcPts val="2300"/>
-              </a:lnSpc>
-              <a:spcBef>
-                <a:spcPts val="100"/>
-              </a:spcBef>
-              <a:spcAft>
-                <a:spcPts val="400"/>
-              </a:spcAft>
-            </a:pPr>
-            <a:r>
-              <a:rPr sz="1800" b="1" i="0">
-                <a:solidFill>
-                  <a:srgbClr val="016F89"/>
-                </a:solidFill>
-                <a:latin typeface="Open Sans"/>
-                <a:ea typeface="Open Sans"/>
-                <a:cs typeface="Open Sans"/>
-              </a:rPr>
-              <a:t>•  </a:t>
-            </a:r>
-            <a:r>
-              <a:rPr sz="1800" b="0" i="0">
-                <a:solidFill>
-                  <a:srgbClr val="1E293B"/>
-                </a:solidFill>
-                <a:latin typeface="Open Sans"/>
-                <a:ea typeface="Open Sans"/>
-                <a:cs typeface="Open Sans"/>
-              </a:rPr>
-              <a:t>37,9% ficaram em silêncio (11)</a:t>
-            </a:r>
-          </a:p>
-          <a:p>
-            <a:pPr algn="l">
-              <a:lnSpc>
-                <a:spcPts val="2300"/>
-              </a:lnSpc>
-              <a:spcBef>
-                <a:spcPts val="100"/>
-              </a:spcBef>
-              <a:spcAft>
-                <a:spcPts val="400"/>
-              </a:spcAft>
-            </a:pPr>
-            <a:r>
-              <a:rPr sz="1800" b="1" i="0">
-                <a:solidFill>
-                  <a:srgbClr val="016F89"/>
-                </a:solidFill>
-                <a:latin typeface="Open Sans"/>
-                <a:ea typeface="Open Sans"/>
-                <a:cs typeface="Open Sans"/>
-              </a:rPr>
-              <a:t>•  </a:t>
-            </a:r>
-            <a:r>
-              <a:rPr sz="1800" b="0" i="0">
-                <a:solidFill>
-                  <a:srgbClr val="1E293B"/>
-                </a:solidFill>
-                <a:latin typeface="Open Sans"/>
-                <a:ea typeface="Open Sans"/>
-                <a:cs typeface="Open Sans"/>
-              </a:rPr>
-              <a:t>27,6% não se sabe como a vítima reagiu (8)</a:t>
-            </a:r>
-          </a:p>
-          <a:p>
-            <a:pPr algn="l">
-              <a:lnSpc>
-                <a:spcPts val="2300"/>
-              </a:lnSpc>
-              <a:spcBef>
-                <a:spcPts val="100"/>
-              </a:spcBef>
-              <a:spcAft>
-                <a:spcPts val="400"/>
-              </a:spcAft>
-            </a:pPr>
-            <a:r>
-              <a:rPr sz="1800" b="1" i="0">
-                <a:solidFill>
-                  <a:srgbClr val="016F89"/>
-                </a:solidFill>
-                <a:latin typeface="Open Sans"/>
-                <a:ea typeface="Open Sans"/>
-                <a:cs typeface="Open Sans"/>
-              </a:rPr>
-              <a:t>•  </a:t>
-            </a:r>
-            <a:r>
-              <a:rPr sz="1800" b="0" i="0">
-                <a:solidFill>
-                  <a:srgbClr val="1E293B"/>
-                </a:solidFill>
-                <a:latin typeface="Open Sans"/>
-                <a:ea typeface="Open Sans"/>
-                <a:cs typeface="Open Sans"/>
-              </a:rPr>
-              <a:t>24,1% denunciaram à polícia (7)</a:t>
-            </a:r>
-          </a:p>
-          <a:p>
-            <a:pPr algn="l">
-              <a:lnSpc>
-                <a:spcPts val="2300"/>
-              </a:lnSpc>
-              <a:spcBef>
-                <a:spcPts val="100"/>
-              </a:spcBef>
-              <a:spcAft>
-                <a:spcPts val="400"/>
-              </a:spcAft>
-            </a:pPr>
-            <a:r>
-              <a:rPr sz="1800" b="1" i="0">
-                <a:solidFill>
-                  <a:srgbClr val="016F89"/>
-                </a:solidFill>
-                <a:latin typeface="Open Sans"/>
-                <a:ea typeface="Open Sans"/>
-                <a:cs typeface="Open Sans"/>
-              </a:rPr>
-              <a:t>•  </a:t>
-            </a:r>
-            <a:r>
-              <a:rPr sz="1800" b="0" i="0">
-                <a:solidFill>
-                  <a:srgbClr val="1E293B"/>
-                </a:solidFill>
-                <a:latin typeface="Open Sans"/>
-                <a:ea typeface="Open Sans"/>
-                <a:cs typeface="Open Sans"/>
-              </a:rPr>
-              <a:t>10,3% pediram ajuda a um adulto (3)</a:t>
-            </a:r>
-          </a:p>
-          <a:p>
-            <a:pPr algn="l">
-              <a:lnSpc>
-                <a:spcPts val="2100"/>
-              </a:lnSpc>
-              <a:spcBef>
-                <a:spcPts val="600"/>
-              </a:spcBef>
-              <a:spcAft>
-                <a:spcPts val="400"/>
-              </a:spcAft>
-            </a:pPr>
-            <a:r>
-              <a:rPr sz="1600" b="0" i="0">
-                <a:solidFill>
-                  <a:srgbClr val="475569"/>
-                </a:solidFill>
-                <a:latin typeface="Open Sans"/>
-                <a:ea typeface="Open Sans"/>
-                <a:cs typeface="Open Sans"/>
-              </a:rPr>
-              <a:t>65,5% dos casos relatados não indicam busca por amparo.</a:t>
-            </a:r>
-          </a:p>
-          <a:p>
-            <a:pPr algn="l">
-              <a:lnSpc>
-                <a:spcPts val="2600"/>
-              </a:lnSpc>
-              <a:spcBef>
-                <a:spcPts val="1400"/>
-              </a:spcBef>
-              <a:spcAft>
-                <a:spcPts val="800"/>
-              </a:spcAft>
-            </a:pPr>
-            <a:r>
-              <a:rPr sz="2000" b="1" i="0">
-                <a:solidFill>
-                  <a:srgbClr val="016F89"/>
-                </a:solidFill>
-                <a:latin typeface="Montserrat"/>
-                <a:ea typeface="Montserrat"/>
-                <a:cs typeface="Montserrat"/>
-              </a:rPr>
-              <a:t>Quem conhece ferramenta de detecção</a:t>
-            </a:r>
-          </a:p>
-          <a:p>
-            <a:pPr algn="l">
-              <a:lnSpc>
-                <a:spcPts val="2400"/>
-              </a:lnSpc>
-              <a:spcBef>
-                <a:spcPts val="0"/>
-              </a:spcBef>
-              <a:spcAft>
-                <a:spcPts val="800"/>
-              </a:spcAft>
-            </a:pPr>
-            <a:r>
-              <a:rPr sz="1800" b="0" i="0">
-                <a:solidFill>
-                  <a:srgbClr val="1E293B"/>
-                </a:solidFill>
-                <a:latin typeface="Open Sans"/>
-                <a:ea typeface="Open Sans"/>
-                <a:cs typeface="Open Sans"/>
-              </a:rPr>
-              <a:t>Mulheres: 34,0% (17 de 50)    ·    Homens: 63,2% (12 de 19)</a:t>
-            </a:r>
-          </a:p>
-          <a:p>
-            <a:pPr algn="l">
-              <a:lnSpc>
-                <a:spcPts val="2100"/>
-              </a:lnSpc>
-              <a:spcBef>
-                <a:spcPts val="600"/>
-              </a:spcBef>
-              <a:spcAft>
-                <a:spcPts val="400"/>
-              </a:spcAft>
-            </a:pPr>
-            <a:r>
-              <a:rPr sz="1600" b="0" i="0">
-                <a:solidFill>
-                  <a:srgbClr val="475569"/>
-                </a:solidFill>
-                <a:latin typeface="Open Sans"/>
-                <a:ea typeface="Open Sans"/>
-                <a:cs typeface="Open Sans"/>
-              </a:rPr>
-              <a:t>Teste exato de Fisher, p = 0,054. Homens com cerca de 3,3 vezes mais chance. Está no limite da significância (subgrupo masculino n = 19). Escolaridade, renda e idade não explicaram esse conhecimento.</a:t>
+              <a:t>45,1% ainda cursam o ensino superior. A faixa de 13 a 17 anos tem 5 pessoas: os dados da infância citados adiante vêm da literatura, não desta amostra.</a:t>
             </a:r>
           </a:p>
         </p:txBody>
@@ -6853,7 +9574,7 @@
                 <a:ea typeface="Montserrat"/>
                 <a:cs typeface="Montserrat"/>
               </a:rPr>
-              <a:t>5. Impactos e conclusão</a:t>
+              <a:t>5. Resultados</a:t>
             </a:r>
           </a:p>
         </p:txBody>
@@ -7029,8 +9750,8 @@
         </p:nvSpPr>
         <p:spPr>
           <a:xfrm>
-            <a:off x="502920" y="980000"/>
-            <a:ext cx="11186000" cy="5250000"/>
+            <a:off x="502920" y="880000"/>
+            <a:ext cx="11100000" cy="480000"/>
           </a:xfrm>
           <a:prstGeom prst="rect">
             <a:avLst/>
@@ -7038,32 +9759,8 @@
           <a:noFill/>
         </p:spPr>
         <p:txBody>
-          <a:bodyPr wrap="square"/>
-          <a:lstStyle/>
-          <a:p>
-            <a:pPr algn="l">
-              <a:lnSpc>
-                <a:spcPts val="2600"/>
-              </a:lnSpc>
-              <a:spcBef>
-                <a:spcPts val="0"/>
-              </a:spcBef>
-              <a:spcAft>
-                <a:spcPts val="800"/>
-              </a:spcAft>
-            </a:pPr>
-            <a:r>
-              <a:rPr sz="2000" b="1" i="0">
-                <a:solidFill>
-                  <a:srgbClr val="016F89"/>
-                </a:solidFill>
-                <a:latin typeface="Montserrat"/>
-                <a:ea typeface="Montserrat"/>
-                <a:cs typeface="Montserrat"/>
-              </a:rPr>
-              <a:t>Impacto</a:t>
-            </a:r>
-          </a:p>
+          <a:bodyPr wrap="square" anchor="t"/>
+          <a:lstStyle/>
           <a:p>
             <a:pPr algn="l">
               <a:lnSpc>
@@ -7073,35 +9770,569 @@
                 <a:spcPts val="0"/>
               </a:spcBef>
               <a:spcAft>
-                <a:spcPts val="800"/>
+                <a:spcPts val="600"/>
               </a:spcAft>
             </a:pPr>
             <a:r>
-              <a:rPr sz="1800" b="0" i="0">
-                <a:solidFill>
-                  <a:srgbClr val="1E293B"/>
+              <a:rPr sz="2000" b="1" i="0">
+                <a:solidFill>
+                  <a:srgbClr val="016F89"/>
+                </a:solidFill>
+                <a:latin typeface="Montserrat"/>
+                <a:ea typeface="Montserrat"/>
+                <a:cs typeface="Montserrat"/>
+              </a:rPr>
+              <a:t>Conhecer o nome não é saber se defender</a:t>
+            </a:r>
+          </a:p>
+        </p:txBody>
+      </p:sp>
+      <p:graphicFrame>
+        <p:nvGraphicFramePr>
+          <p:cNvPr id="37" name="Chart 36"/>
+          <p:cNvGraphicFramePr>
+            <a:graphicFrameLocks noGrp="1"/>
+          </p:cNvGraphicFramePr>
+          <p:nvPr/>
+        </p:nvGraphicFramePr>
+        <p:xfrm>
+          <a:off x="280000" y="1400000"/>
+          <a:ext cx="3800000" cy="4000000"/>
+        </p:xfrm>
+        <a:graphic>
+          <a:graphicData uri="http://schemas.openxmlformats.org/drawingml/2006/chart">
+            <c:chart xmlns:c="http://schemas.openxmlformats.org/drawingml/2006/chart" r:id="rId3"/>
+          </a:graphicData>
+        </a:graphic>
+      </p:graphicFrame>
+      <p:graphicFrame>
+        <p:nvGraphicFramePr>
+          <p:cNvPr id="38" name="Chart 37"/>
+          <p:cNvGraphicFramePr>
+            <a:graphicFrameLocks noGrp="1"/>
+          </p:cNvGraphicFramePr>
+          <p:nvPr/>
+        </p:nvGraphicFramePr>
+        <p:xfrm>
+          <a:off x="4230000" y="1400000"/>
+          <a:ext cx="3800000" cy="4000000"/>
+        </p:xfrm>
+        <a:graphic>
+          <a:graphicData uri="http://schemas.openxmlformats.org/drawingml/2006/chart">
+            <c:chart xmlns:c="http://schemas.openxmlformats.org/drawingml/2006/chart" r:id="rId4"/>
+          </a:graphicData>
+        </a:graphic>
+      </p:graphicFrame>
+      <p:graphicFrame>
+        <p:nvGraphicFramePr>
+          <p:cNvPr id="39" name="Chart 38"/>
+          <p:cNvGraphicFramePr>
+            <a:graphicFrameLocks noGrp="1"/>
+          </p:cNvGraphicFramePr>
+          <p:nvPr/>
+        </p:nvGraphicFramePr>
+        <p:xfrm>
+          <a:off x="8180000" y="1400000"/>
+          <a:ext cx="3800000" cy="4000000"/>
+        </p:xfrm>
+        <a:graphic>
+          <a:graphicData uri="http://schemas.openxmlformats.org/drawingml/2006/chart">
+            <c:chart xmlns:c="http://schemas.openxmlformats.org/drawingml/2006/chart" r:id="rId5"/>
+          </a:graphicData>
+        </a:graphic>
+      </p:graphicFrame>
+      <p:sp>
+        <p:nvSpPr>
+          <p:cNvPr id="40" name="TextBox 39"/>
+          <p:cNvSpPr txBox="1"/>
+          <p:nvPr/>
+        </p:nvSpPr>
+        <p:spPr>
+          <a:xfrm>
+            <a:off x="502920" y="5480000"/>
+            <a:ext cx="11100000" cy="800000"/>
+          </a:xfrm>
+          <a:prstGeom prst="rect">
+            <a:avLst/>
+          </a:prstGeom>
+          <a:noFill/>
+        </p:spPr>
+        <p:txBody>
+          <a:bodyPr wrap="square" anchor="t"/>
+          <a:lstStyle/>
+          <a:p>
+            <a:pPr algn="l">
+              <a:lnSpc>
+                <a:spcPts val="1800"/>
+              </a:lnSpc>
+              <a:spcBef>
+                <a:spcPts val="400"/>
+              </a:spcBef>
+              <a:spcAft>
+                <a:spcPts val="200"/>
+              </a:spcAft>
+            </a:pPr>
+            <a:r>
+              <a:rPr sz="1400" b="0" i="0">
+                <a:solidFill>
+                  <a:srgbClr val="475569"/>
                 </a:solidFill>
                 <a:latin typeface="Open Sans"/>
                 <a:ea typeface="Open Sans"/>
                 <a:cs typeface="Open Sans"/>
               </a:rPr>
-              <a:t>O silêncio deixa o conteúdo circular. Na escola, o deepfake vira exposição e cyberbullying.</a:t>
-            </a:r>
-          </a:p>
+              <a:t>N = 71. A fatia escura da terceira pizza é quem não sabe verificar a mídia. São quase 40 pontos abaixo de quem só conhece o termo.</a:t>
+            </a:r>
+          </a:p>
+        </p:txBody>
+      </p:sp>
+    </p:spTree>
+  </p:cSld>
+  <p:clrMapOvr>
+    <a:masterClrMapping/>
+  </p:clrMapOvr>
+</p:sld>
+</file>
+
+<file path=ppt/slides/slide8.xml><?xml version="1.0" encoding="utf-8"?>
+<p:sld xmlns:a="http://schemas.openxmlformats.org/drawingml/2006/main" xmlns:p="http://schemas.openxmlformats.org/presentationml/2006/main" xmlns:r="http://schemas.openxmlformats.org/officeDocument/2006/relationships">
+  <p:cSld>
+    <p:bg>
+      <p:bgPr>
+        <a:solidFill>
+          <a:srgbClr val="FFFFFF"/>
+        </a:solidFill>
+        <a:effectLst/>
+      </p:bgPr>
+    </p:bg>
+    <p:spTree>
+      <p:nvGrpSpPr>
+        <p:cNvPr id="1" name=""/>
+        <p:cNvGrpSpPr/>
+        <p:nvPr/>
+      </p:nvGrpSpPr>
+      <p:grpSpPr/>
+      <p:sp>
+        <p:nvSpPr>
+          <p:cNvPr id="2" name="Rectangle 1"/>
+          <p:cNvSpPr/>
+          <p:nvPr/>
+        </p:nvSpPr>
+        <p:spPr>
+          <a:xfrm>
+            <a:off x="0" y="0"/>
+            <a:ext cx="12192000" cy="739080"/>
+          </a:xfrm>
+          <a:prstGeom prst="rect">
+            <a:avLst/>
+          </a:prstGeom>
+          <a:solidFill>
+            <a:srgbClr val="016F89"/>
+          </a:solidFill>
+          <a:ln>
+            <a:noFill/>
+          </a:ln>
+          <a:effectLst/>
+        </p:spPr>
+        <p:style>
+          <a:lnRef idx="1">
+            <a:schemeClr val="accent1"/>
+          </a:lnRef>
+          <a:fillRef idx="3">
+            <a:schemeClr val="accent1"/>
+          </a:fillRef>
+          <a:effectRef idx="2">
+            <a:schemeClr val="accent1"/>
+          </a:effectRef>
+          <a:fontRef idx="minor">
+            <a:schemeClr val="lt1"/>
+          </a:fontRef>
+        </p:style>
+        <p:txBody>
+          <a:bodyPr rtlCol="0" anchor="ctr"/>
+          <a:lstStyle/>
+          <a:p>
+            <a:pPr algn="ctr"/>
+            <a:endParaRPr/>
+          </a:p>
+        </p:txBody>
+      </p:sp>
+      <p:sp>
+        <p:nvSpPr>
+          <p:cNvPr id="3" name="Rectangle 2"/>
+          <p:cNvSpPr/>
+          <p:nvPr/>
+        </p:nvSpPr>
+        <p:spPr>
+          <a:xfrm>
+            <a:off x="0" y="6410325"/>
+            <a:ext cx="12192000" cy="447675"/>
+          </a:xfrm>
+          <a:prstGeom prst="rect">
+            <a:avLst/>
+          </a:prstGeom>
+          <a:solidFill>
+            <a:srgbClr val="F8FAFC"/>
+          </a:solidFill>
+          <a:ln>
+            <a:noFill/>
+          </a:ln>
+          <a:effectLst/>
+        </p:spPr>
+        <p:style>
+          <a:lnRef idx="1">
+            <a:schemeClr val="accent1"/>
+          </a:lnRef>
+          <a:fillRef idx="3">
+            <a:schemeClr val="accent1"/>
+          </a:fillRef>
+          <a:effectRef idx="2">
+            <a:schemeClr val="accent1"/>
+          </a:effectRef>
+          <a:fontRef idx="minor">
+            <a:schemeClr val="lt1"/>
+          </a:fontRef>
+        </p:style>
+        <p:txBody>
+          <a:bodyPr rtlCol="0" anchor="ctr"/>
+          <a:lstStyle/>
+          <a:p>
+            <a:pPr algn="ctr"/>
+            <a:endParaRPr/>
+          </a:p>
+        </p:txBody>
+      </p:sp>
+      <p:sp>
+        <p:nvSpPr>
+          <p:cNvPr id="4" name="Rectangle 3"/>
+          <p:cNvSpPr/>
+          <p:nvPr/>
+        </p:nvSpPr>
+        <p:spPr>
+          <a:xfrm>
+            <a:off x="0" y="700980"/>
+            <a:ext cx="12192000" cy="38100"/>
+          </a:xfrm>
+          <a:prstGeom prst="rect">
+            <a:avLst/>
+          </a:prstGeom>
+          <a:solidFill>
+            <a:srgbClr val="00C2CB"/>
+          </a:solidFill>
+          <a:ln>
+            <a:noFill/>
+          </a:ln>
+          <a:effectLst/>
+        </p:spPr>
+        <p:style>
+          <a:lnRef idx="1">
+            <a:schemeClr val="accent1"/>
+          </a:lnRef>
+          <a:fillRef idx="3">
+            <a:schemeClr val="accent1"/>
+          </a:fillRef>
+          <a:effectRef idx="2">
+            <a:schemeClr val="accent1"/>
+          </a:effectRef>
+          <a:fontRef idx="minor">
+            <a:schemeClr val="lt1"/>
+          </a:fontRef>
+        </p:style>
+        <p:txBody>
+          <a:bodyPr rtlCol="0" anchor="ctr"/>
+          <a:lstStyle/>
+          <a:p>
+            <a:pPr algn="ctr"/>
+            <a:endParaRPr/>
+          </a:p>
+        </p:txBody>
+      </p:sp>
+      <p:sp>
+        <p:nvSpPr>
+          <p:cNvPr id="5" name="Rectangle 4"/>
+          <p:cNvSpPr/>
+          <p:nvPr/>
+        </p:nvSpPr>
+        <p:spPr>
+          <a:xfrm>
+            <a:off x="0" y="6410325"/>
+            <a:ext cx="12192000" cy="9525"/>
+          </a:xfrm>
+          <a:prstGeom prst="rect">
+            <a:avLst/>
+          </a:prstGeom>
+          <a:solidFill>
+            <a:srgbClr val="E2E8F0"/>
+          </a:solidFill>
+          <a:ln>
+            <a:noFill/>
+          </a:ln>
+          <a:effectLst/>
+        </p:spPr>
+        <p:style>
+          <a:lnRef idx="1">
+            <a:schemeClr val="accent1"/>
+          </a:lnRef>
+          <a:fillRef idx="3">
+            <a:schemeClr val="accent1"/>
+          </a:fillRef>
+          <a:effectRef idx="2">
+            <a:schemeClr val="accent1"/>
+          </a:effectRef>
+          <a:fontRef idx="minor">
+            <a:schemeClr val="lt1"/>
+          </a:fontRef>
+        </p:style>
+        <p:txBody>
+          <a:bodyPr rtlCol="0" anchor="ctr"/>
+          <a:lstStyle/>
+          <a:p>
+            <a:pPr algn="ctr"/>
+            <a:endParaRPr/>
+          </a:p>
+        </p:txBody>
+      </p:sp>
+      <p:sp>
+        <p:nvSpPr>
+          <p:cNvPr id="25" name="TextBox 24"/>
+          <p:cNvSpPr txBox="1"/>
+          <p:nvPr/>
+        </p:nvSpPr>
+        <p:spPr>
+          <a:xfrm>
+            <a:off x="457200" y="190500"/>
+            <a:ext cx="8600000" cy="320601"/>
+          </a:xfrm>
+          <a:prstGeom prst="rect">
+            <a:avLst/>
+          </a:prstGeom>
+          <a:noFill/>
+        </p:spPr>
+        <p:txBody>
+          <a:bodyPr wrap="square" lIns="0" tIns="0" rIns="0" bIns="0" anchor="t"/>
+          <a:lstStyle/>
           <a:p>
             <a:pPr algn="l">
               <a:lnSpc>
-                <a:spcPts val="2400"/>
+                <a:spcPts val="2200"/>
               </a:lnSpc>
               <a:spcBef>
                 <a:spcPts val="0"/>
               </a:spcBef>
               <a:spcAft>
-                <a:spcPts val="800"/>
+                <a:spcPts val="0"/>
               </a:spcAft>
             </a:pPr>
             <a:r>
-              <a:rPr sz="1800" b="0" i="0">
+              <a:rPr sz="2000" b="1" i="0">
+                <a:solidFill>
+                  <a:srgbClr val="FFFFFF"/>
+                </a:solidFill>
+                <a:latin typeface="Montserrat"/>
+                <a:ea typeface="Montserrat"/>
+                <a:cs typeface="Montserrat"/>
+              </a:rPr>
+              <a:t>6. Exposição e reação</a:t>
+            </a:r>
+          </a:p>
+        </p:txBody>
+      </p:sp>
+      <p:sp>
+        <p:nvSpPr>
+          <p:cNvPr id="26" name="TextBox 25"/>
+          <p:cNvSpPr txBox="1"/>
+          <p:nvPr/>
+        </p:nvSpPr>
+        <p:spPr>
+          <a:xfrm>
+            <a:off x="457200" y="6553200"/>
+            <a:ext cx="7800000" cy="161583"/>
+          </a:xfrm>
+          <a:prstGeom prst="rect">
+            <a:avLst/>
+          </a:prstGeom>
+          <a:noFill/>
+        </p:spPr>
+        <p:txBody>
+          <a:bodyPr wrap="square" lIns="0" tIns="0" rIns="0" bIns="0" anchor="t"/>
+          <a:lstStyle/>
+          <a:p>
+            <a:pPr algn="l">
+              <a:lnSpc>
+                <a:spcPts val="1400"/>
+              </a:lnSpc>
+              <a:spcBef>
+                <a:spcPts val="0"/>
+              </a:spcBef>
+              <a:spcAft>
+                <a:spcPts val="0"/>
+              </a:spcAft>
+            </a:pPr>
+            <a:r>
+              <a:rPr sz="1100" b="0" i="0">
+                <a:solidFill>
+                  <a:srgbClr val="64748B"/>
+                </a:solidFill>
+                <a:latin typeface="Montserrat"/>
+                <a:ea typeface="Montserrat"/>
+                <a:cs typeface="Montserrat"/>
+              </a:rPr>
+              <a:t>Deepfake, riscos e algoritmos</a:t>
+            </a:r>
+          </a:p>
+        </p:txBody>
+      </p:sp>
+      <p:sp>
+        <p:nvSpPr>
+          <p:cNvPr id="28" name="TextBox 27"/>
+          <p:cNvSpPr txBox="1"/>
+          <p:nvPr/>
+        </p:nvSpPr>
+        <p:spPr>
+          <a:xfrm>
+            <a:off x="10267950" y="264765"/>
+            <a:ext cx="1401025" cy="161583"/>
+          </a:xfrm>
+          <a:prstGeom prst="rect">
+            <a:avLst/>
+          </a:prstGeom>
+          <a:noFill/>
+        </p:spPr>
+        <p:txBody>
+          <a:bodyPr wrap="none" lIns="0" tIns="0" rIns="0" bIns="0" anchor="t">
+            <a:spAutoFit/>
+          </a:bodyPr>
+          <a:lstStyle/>
+          <a:p>
+            <a:pPr algn="l"/>
+            <a:r>
+              <a:rPr sz="1050" b="1" i="0" u="none" dirty="0" smtClean="0">
+                <a:solidFill>
+                  <a:srgbClr val="A5F3FC"/>
+                </a:solidFill>
+                <a:latin typeface="Montserrat"/>
+              </a:rPr>
+              <a:t>X</a:t>
+            </a:r>
+            <a:r>
+              <a:rPr lang="pt-BR" sz="1050" b="1" dirty="0" smtClean="0">
+                <a:solidFill>
+                  <a:srgbClr val="A5F3FC"/>
+                </a:solidFill>
+                <a:latin typeface="Montserrat"/>
+              </a:rPr>
+              <a:t>IV</a:t>
+            </a:r>
+            <a:r>
+              <a:rPr sz="1050" b="1" i="0" u="none" dirty="0" smtClean="0">
+                <a:solidFill>
+                  <a:srgbClr val="A5F3FC"/>
+                </a:solidFill>
+                <a:latin typeface="Montserrat"/>
+              </a:rPr>
+              <a:t> </a:t>
+            </a:r>
+            <a:r>
+              <a:rPr sz="1050" b="1" i="0" u="none" dirty="0">
+                <a:solidFill>
+                  <a:srgbClr val="A5F3FC"/>
+                </a:solidFill>
+                <a:latin typeface="Montserrat"/>
+              </a:rPr>
+              <a:t>JIC UNESA </a:t>
+            </a:r>
+            <a:r>
+              <a:rPr lang="pt-BR" sz="1050" b="1" i="0" u="none" dirty="0" smtClean="0">
+                <a:solidFill>
+                  <a:srgbClr val="A5F3FC"/>
+                </a:solidFill>
+                <a:latin typeface="Montserrat"/>
+              </a:rPr>
+              <a:t>(</a:t>
+            </a:r>
+            <a:r>
+              <a:rPr sz="1050" b="1" i="0" u="none" dirty="0" smtClean="0">
+                <a:solidFill>
+                  <a:srgbClr val="A5F3FC"/>
+                </a:solidFill>
+                <a:latin typeface="Montserrat"/>
+              </a:rPr>
+              <a:t>2026</a:t>
+            </a:r>
+            <a:r>
+              <a:rPr lang="pt-BR" sz="1050" b="1" i="0" u="none" dirty="0" smtClean="0">
+                <a:solidFill>
+                  <a:srgbClr val="A5F3FC"/>
+                </a:solidFill>
+                <a:latin typeface="Montserrat"/>
+              </a:rPr>
+              <a:t>)</a:t>
+            </a:r>
+            <a:endParaRPr sz="1050" b="1" i="0" u="none" dirty="0">
+              <a:solidFill>
+                <a:srgbClr val="A5F3FC"/>
+              </a:solidFill>
+              <a:latin typeface="Montserrat"/>
+            </a:endParaRPr>
+          </a:p>
+        </p:txBody>
+      </p:sp>
+      <p:pic>
+        <p:nvPicPr>
+          <p:cNvPr id="35" name="Picture 9"/>
+          <p:cNvPicPr/>
+          <p:nvPr/>
+        </p:nvPicPr>
+        <p:blipFill>
+          <a:blip r:embed="rId2"/>
+          <a:stretch/>
+        </p:blipFill>
+        <p:spPr>
+          <a:xfrm>
+            <a:off x="9716240" y="125002"/>
+            <a:ext cx="461819" cy="391625"/>
+          </a:xfrm>
+          <a:prstGeom prst="rect">
+            <a:avLst/>
+          </a:prstGeom>
+          <a:ln w="0">
+            <a:noFill/>
+          </a:ln>
+        </p:spPr>
+      </p:pic>
+      <p:sp>
+        <p:nvSpPr>
+          <p:cNvPr id="36" name="TextBox 35"/>
+          <p:cNvSpPr txBox="1"/>
+          <p:nvPr/>
+        </p:nvSpPr>
+        <p:spPr>
+          <a:xfrm>
+            <a:off x="502920" y="880000"/>
+            <a:ext cx="11100000" cy="420000"/>
+          </a:xfrm>
+          <a:prstGeom prst="rect">
+            <a:avLst/>
+          </a:prstGeom>
+          <a:noFill/>
+        </p:spPr>
+        <p:txBody>
+          <a:bodyPr wrap="square" anchor="t"/>
+          <a:lstStyle/>
+          <a:p>
+            <a:pPr algn="l">
+              <a:lnSpc>
+                <a:spcPts val="2200"/>
+              </a:lnSpc>
+              <a:spcBef>
+                <a:spcPts val="0"/>
+              </a:spcBef>
+              <a:spcAft>
+                <a:spcPts val="600"/>
+              </a:spcAft>
+            </a:pPr>
+            <a:r>
+              <a:rPr sz="1700" b="0" i="0">
                 <a:solidFill>
                   <a:srgbClr val="1E293B"/>
                 </a:solidFill>
@@ -7109,160 +10340,628 @@
                 <a:ea typeface="Open Sans"/>
                 <a:cs typeface="Open Sans"/>
               </a:rPr>
-              <a:t>Na literatura do relatório, cerca de 95% da pornografia deepfake atinge mulheres e meninas — o mesmo grupo que, nesta amostra, menos conhece as ferramentas de defesa.</a:t>
-            </a:r>
-          </a:p>
+              <a:t>À direita, só entram os casos em que a pessoa sofreu um ataque ou conhece uma vítima.</a:t>
+            </a:r>
+          </a:p>
+        </p:txBody>
+      </p:sp>
+      <p:graphicFrame>
+        <p:nvGraphicFramePr>
+          <p:cNvPr id="37" name="Chart 36"/>
+          <p:cNvGraphicFramePr>
+            <a:graphicFrameLocks noGrp="1"/>
+          </p:cNvGraphicFramePr>
+          <p:nvPr/>
+        </p:nvGraphicFramePr>
+        <p:xfrm>
+          <a:off x="400000" y="1380000"/>
+          <a:ext cx="5600000" cy="4000000"/>
+        </p:xfrm>
+        <a:graphic>
+          <a:graphicData uri="http://schemas.openxmlformats.org/drawingml/2006/chart">
+            <c:chart xmlns:c="http://schemas.openxmlformats.org/drawingml/2006/chart" r:id="rId3"/>
+          </a:graphicData>
+        </a:graphic>
+      </p:graphicFrame>
+      <p:graphicFrame>
+        <p:nvGraphicFramePr>
+          <p:cNvPr id="38" name="Chart 37"/>
+          <p:cNvGraphicFramePr>
+            <a:graphicFrameLocks noGrp="1"/>
+          </p:cNvGraphicFramePr>
+          <p:nvPr/>
+        </p:nvGraphicFramePr>
+        <p:xfrm>
+          <a:off x="6100000" y="1380000"/>
+          <a:ext cx="5700000" cy="4000000"/>
+        </p:xfrm>
+        <a:graphic>
+          <a:graphicData uri="http://schemas.openxmlformats.org/drawingml/2006/chart">
+            <c:chart xmlns:c="http://schemas.openxmlformats.org/drawingml/2006/chart" r:id="rId4"/>
+          </a:graphicData>
+        </a:graphic>
+      </p:graphicFrame>
+      <p:sp>
+        <p:nvSpPr>
+          <p:cNvPr id="39" name="TextBox 38"/>
+          <p:cNvSpPr txBox="1"/>
+          <p:nvPr/>
+        </p:nvSpPr>
+        <p:spPr>
+          <a:xfrm>
+            <a:off x="502920" y="5480000"/>
+            <a:ext cx="11100000" cy="800000"/>
+          </a:xfrm>
+          <a:prstGeom prst="rect">
+            <a:avLst/>
+          </a:prstGeom>
+          <a:noFill/>
+        </p:spPr>
+        <p:txBody>
+          <a:bodyPr wrap="square" anchor="t"/>
+          <a:lstStyle/>
           <a:p>
             <a:pPr algn="l">
               <a:lnSpc>
-                <a:spcPts val="2600"/>
+                <a:spcPts val="1800"/>
               </a:lnSpc>
               <a:spcBef>
-                <a:spcPts val="1400"/>
+                <a:spcPts val="400"/>
               </a:spcBef>
               <a:spcAft>
-                <a:spcPts val="800"/>
+                <a:spcPts val="200"/>
               </a:spcAft>
             </a:pPr>
             <a:r>
+              <a:rPr sz="1400" b="0" i="0">
+                <a:solidFill>
+                  <a:srgbClr val="475569"/>
+                </a:solidFill>
+                <a:latin typeface="Open Sans"/>
+                <a:ea typeface="Open Sans"/>
+                <a:cs typeface="Open Sans"/>
+              </a:rPr>
+              <a:t>Silêncio e “não se sabe” somam 65,5%. A minoria procurou a polícia ou um adulto.</a:t>
+            </a:r>
+          </a:p>
+        </p:txBody>
+      </p:sp>
+    </p:spTree>
+  </p:cSld>
+  <p:clrMapOvr>
+    <a:masterClrMapping/>
+  </p:clrMapOvr>
+</p:sld>
+</file>
+
+<file path=ppt/slides/slide9.xml><?xml version="1.0" encoding="utf-8"?>
+<p:sld xmlns:a="http://schemas.openxmlformats.org/drawingml/2006/main" xmlns:p="http://schemas.openxmlformats.org/presentationml/2006/main" xmlns:r="http://schemas.openxmlformats.org/officeDocument/2006/relationships">
+  <p:cSld>
+    <p:bg>
+      <p:bgPr>
+        <a:solidFill>
+          <a:srgbClr val="FFFFFF"/>
+        </a:solidFill>
+        <a:effectLst/>
+      </p:bgPr>
+    </p:bg>
+    <p:spTree>
+      <p:nvGrpSpPr>
+        <p:cNvPr id="1" name=""/>
+        <p:cNvGrpSpPr/>
+        <p:nvPr/>
+      </p:nvGrpSpPr>
+      <p:grpSpPr/>
+      <p:sp>
+        <p:nvSpPr>
+          <p:cNvPr id="2" name="Rectangle 1"/>
+          <p:cNvSpPr/>
+          <p:nvPr/>
+        </p:nvSpPr>
+        <p:spPr>
+          <a:xfrm>
+            <a:off x="0" y="0"/>
+            <a:ext cx="12192000" cy="739080"/>
+          </a:xfrm>
+          <a:prstGeom prst="rect">
+            <a:avLst/>
+          </a:prstGeom>
+          <a:solidFill>
+            <a:srgbClr val="016F89"/>
+          </a:solidFill>
+          <a:ln>
+            <a:noFill/>
+          </a:ln>
+          <a:effectLst/>
+        </p:spPr>
+        <p:style>
+          <a:lnRef idx="1">
+            <a:schemeClr val="accent1"/>
+          </a:lnRef>
+          <a:fillRef idx="3">
+            <a:schemeClr val="accent1"/>
+          </a:fillRef>
+          <a:effectRef idx="2">
+            <a:schemeClr val="accent1"/>
+          </a:effectRef>
+          <a:fontRef idx="minor">
+            <a:schemeClr val="lt1"/>
+          </a:fontRef>
+        </p:style>
+        <p:txBody>
+          <a:bodyPr rtlCol="0" anchor="ctr"/>
+          <a:lstStyle/>
+          <a:p>
+            <a:pPr algn="ctr"/>
+            <a:endParaRPr/>
+          </a:p>
+        </p:txBody>
+      </p:sp>
+      <p:sp>
+        <p:nvSpPr>
+          <p:cNvPr id="3" name="Rectangle 2"/>
+          <p:cNvSpPr/>
+          <p:nvPr/>
+        </p:nvSpPr>
+        <p:spPr>
+          <a:xfrm>
+            <a:off x="0" y="6410325"/>
+            <a:ext cx="12192000" cy="447675"/>
+          </a:xfrm>
+          <a:prstGeom prst="rect">
+            <a:avLst/>
+          </a:prstGeom>
+          <a:solidFill>
+            <a:srgbClr val="F8FAFC"/>
+          </a:solidFill>
+          <a:ln>
+            <a:noFill/>
+          </a:ln>
+          <a:effectLst/>
+        </p:spPr>
+        <p:style>
+          <a:lnRef idx="1">
+            <a:schemeClr val="accent1"/>
+          </a:lnRef>
+          <a:fillRef idx="3">
+            <a:schemeClr val="accent1"/>
+          </a:fillRef>
+          <a:effectRef idx="2">
+            <a:schemeClr val="accent1"/>
+          </a:effectRef>
+          <a:fontRef idx="minor">
+            <a:schemeClr val="lt1"/>
+          </a:fontRef>
+        </p:style>
+        <p:txBody>
+          <a:bodyPr rtlCol="0" anchor="ctr"/>
+          <a:lstStyle/>
+          <a:p>
+            <a:pPr algn="ctr"/>
+            <a:endParaRPr/>
+          </a:p>
+        </p:txBody>
+      </p:sp>
+      <p:sp>
+        <p:nvSpPr>
+          <p:cNvPr id="4" name="Rectangle 3"/>
+          <p:cNvSpPr/>
+          <p:nvPr/>
+        </p:nvSpPr>
+        <p:spPr>
+          <a:xfrm>
+            <a:off x="0" y="700980"/>
+            <a:ext cx="12192000" cy="38100"/>
+          </a:xfrm>
+          <a:prstGeom prst="rect">
+            <a:avLst/>
+          </a:prstGeom>
+          <a:solidFill>
+            <a:srgbClr val="00C2CB"/>
+          </a:solidFill>
+          <a:ln>
+            <a:noFill/>
+          </a:ln>
+          <a:effectLst/>
+        </p:spPr>
+        <p:style>
+          <a:lnRef idx="1">
+            <a:schemeClr val="accent1"/>
+          </a:lnRef>
+          <a:fillRef idx="3">
+            <a:schemeClr val="accent1"/>
+          </a:fillRef>
+          <a:effectRef idx="2">
+            <a:schemeClr val="accent1"/>
+          </a:effectRef>
+          <a:fontRef idx="minor">
+            <a:schemeClr val="lt1"/>
+          </a:fontRef>
+        </p:style>
+        <p:txBody>
+          <a:bodyPr rtlCol="0" anchor="ctr"/>
+          <a:lstStyle/>
+          <a:p>
+            <a:pPr algn="ctr"/>
+            <a:endParaRPr/>
+          </a:p>
+        </p:txBody>
+      </p:sp>
+      <p:sp>
+        <p:nvSpPr>
+          <p:cNvPr id="5" name="Rectangle 4"/>
+          <p:cNvSpPr/>
+          <p:nvPr/>
+        </p:nvSpPr>
+        <p:spPr>
+          <a:xfrm>
+            <a:off x="0" y="6410325"/>
+            <a:ext cx="12192000" cy="9525"/>
+          </a:xfrm>
+          <a:prstGeom prst="rect">
+            <a:avLst/>
+          </a:prstGeom>
+          <a:solidFill>
+            <a:srgbClr val="E2E8F0"/>
+          </a:solidFill>
+          <a:ln>
+            <a:noFill/>
+          </a:ln>
+          <a:effectLst/>
+        </p:spPr>
+        <p:style>
+          <a:lnRef idx="1">
+            <a:schemeClr val="accent1"/>
+          </a:lnRef>
+          <a:fillRef idx="3">
+            <a:schemeClr val="accent1"/>
+          </a:fillRef>
+          <a:effectRef idx="2">
+            <a:schemeClr val="accent1"/>
+          </a:effectRef>
+          <a:fontRef idx="minor">
+            <a:schemeClr val="lt1"/>
+          </a:fontRef>
+        </p:style>
+        <p:txBody>
+          <a:bodyPr rtlCol="0" anchor="ctr"/>
+          <a:lstStyle/>
+          <a:p>
+            <a:pPr algn="ctr"/>
+            <a:endParaRPr/>
+          </a:p>
+        </p:txBody>
+      </p:sp>
+      <p:sp>
+        <p:nvSpPr>
+          <p:cNvPr id="25" name="TextBox 24"/>
+          <p:cNvSpPr txBox="1"/>
+          <p:nvPr/>
+        </p:nvSpPr>
+        <p:spPr>
+          <a:xfrm>
+            <a:off x="457200" y="190500"/>
+            <a:ext cx="8600000" cy="320601"/>
+          </a:xfrm>
+          <a:prstGeom prst="rect">
+            <a:avLst/>
+          </a:prstGeom>
+          <a:noFill/>
+        </p:spPr>
+        <p:txBody>
+          <a:bodyPr wrap="square" lIns="0" tIns="0" rIns="0" bIns="0" anchor="t"/>
+          <a:lstStyle/>
+          <a:p>
+            <a:pPr algn="l">
+              <a:lnSpc>
+                <a:spcPts val="2200"/>
+              </a:lnSpc>
+              <a:spcBef>
+                <a:spcPts val="0"/>
+              </a:spcBef>
+              <a:spcAft>
+                <a:spcPts val="0"/>
+              </a:spcAft>
+            </a:pPr>
+            <a:r>
               <a:rPr sz="2000" b="1" i="0">
                 <a:solidFill>
-                  <a:srgbClr val="016F89"/>
+                  <a:srgbClr val="FFFFFF"/>
                 </a:solidFill>
                 <a:latin typeface="Montserrat"/>
                 <a:ea typeface="Montserrat"/>
                 <a:cs typeface="Montserrat"/>
               </a:rPr>
-              <a:t>Conclusão</a:t>
-            </a:r>
-          </a:p>
+              <a:t>7. Gênero e defesa</a:t>
+            </a:r>
+          </a:p>
+        </p:txBody>
+      </p:sp>
+      <p:sp>
+        <p:nvSpPr>
+          <p:cNvPr id="26" name="TextBox 25"/>
+          <p:cNvSpPr txBox="1"/>
+          <p:nvPr/>
+        </p:nvSpPr>
+        <p:spPr>
+          <a:xfrm>
+            <a:off x="457200" y="6553200"/>
+            <a:ext cx="7800000" cy="161583"/>
+          </a:xfrm>
+          <a:prstGeom prst="rect">
+            <a:avLst/>
+          </a:prstGeom>
+          <a:noFill/>
+        </p:spPr>
+        <p:txBody>
+          <a:bodyPr wrap="square" lIns="0" tIns="0" rIns="0" bIns="0" anchor="t"/>
+          <a:lstStyle/>
           <a:p>
             <a:pPr algn="l">
               <a:lnSpc>
-                <a:spcPts val="2300"/>
+                <a:spcPts val="1400"/>
               </a:lnSpc>
               <a:spcBef>
-                <a:spcPts val="100"/>
+                <a:spcPts val="0"/>
               </a:spcBef>
               <a:spcAft>
-                <a:spcPts val="400"/>
+                <a:spcPts val="0"/>
               </a:spcAft>
             </a:pPr>
             <a:r>
-              <a:rPr sz="1800" b="1" i="0">
-                <a:solidFill>
-                  <a:srgbClr val="016F89"/>
+              <a:rPr sz="1100" b="0" i="0">
+                <a:solidFill>
+                  <a:srgbClr val="64748B"/>
+                </a:solidFill>
+                <a:latin typeface="Montserrat"/>
+                <a:ea typeface="Montserrat"/>
+                <a:cs typeface="Montserrat"/>
+              </a:rPr>
+              <a:t>Deepfake, riscos e algoritmos</a:t>
+            </a:r>
+          </a:p>
+        </p:txBody>
+      </p:sp>
+      <p:sp>
+        <p:nvSpPr>
+          <p:cNvPr id="28" name="TextBox 27"/>
+          <p:cNvSpPr txBox="1"/>
+          <p:nvPr/>
+        </p:nvSpPr>
+        <p:spPr>
+          <a:xfrm>
+            <a:off x="10267950" y="264765"/>
+            <a:ext cx="1401025" cy="161583"/>
+          </a:xfrm>
+          <a:prstGeom prst="rect">
+            <a:avLst/>
+          </a:prstGeom>
+          <a:noFill/>
+        </p:spPr>
+        <p:txBody>
+          <a:bodyPr wrap="none" lIns="0" tIns="0" rIns="0" bIns="0" anchor="t">
+            <a:spAutoFit/>
+          </a:bodyPr>
+          <a:lstStyle/>
+          <a:p>
+            <a:pPr algn="l"/>
+            <a:r>
+              <a:rPr sz="1050" b="1" i="0" u="none" dirty="0" smtClean="0">
+                <a:solidFill>
+                  <a:srgbClr val="A5F3FC"/>
+                </a:solidFill>
+                <a:latin typeface="Montserrat"/>
+              </a:rPr>
+              <a:t>X</a:t>
+            </a:r>
+            <a:r>
+              <a:rPr lang="pt-BR" sz="1050" b="1" dirty="0" smtClean="0">
+                <a:solidFill>
+                  <a:srgbClr val="A5F3FC"/>
+                </a:solidFill>
+                <a:latin typeface="Montserrat"/>
+              </a:rPr>
+              <a:t>IV</a:t>
+            </a:r>
+            <a:r>
+              <a:rPr sz="1050" b="1" i="0" u="none" dirty="0" smtClean="0">
+                <a:solidFill>
+                  <a:srgbClr val="A5F3FC"/>
+                </a:solidFill>
+                <a:latin typeface="Montserrat"/>
+              </a:rPr>
+              <a:t> </a:t>
+            </a:r>
+            <a:r>
+              <a:rPr sz="1050" b="1" i="0" u="none" dirty="0">
+                <a:solidFill>
+                  <a:srgbClr val="A5F3FC"/>
+                </a:solidFill>
+                <a:latin typeface="Montserrat"/>
+              </a:rPr>
+              <a:t>JIC UNESA </a:t>
+            </a:r>
+            <a:r>
+              <a:rPr lang="pt-BR" sz="1050" b="1" i="0" u="none" dirty="0" smtClean="0">
+                <a:solidFill>
+                  <a:srgbClr val="A5F3FC"/>
+                </a:solidFill>
+                <a:latin typeface="Montserrat"/>
+              </a:rPr>
+              <a:t>(</a:t>
+            </a:r>
+            <a:r>
+              <a:rPr sz="1050" b="1" i="0" u="none" dirty="0" smtClean="0">
+                <a:solidFill>
+                  <a:srgbClr val="A5F3FC"/>
+                </a:solidFill>
+                <a:latin typeface="Montserrat"/>
+              </a:rPr>
+              <a:t>2026</a:t>
+            </a:r>
+            <a:r>
+              <a:rPr lang="pt-BR" sz="1050" b="1" i="0" u="none" dirty="0" smtClean="0">
+                <a:solidFill>
+                  <a:srgbClr val="A5F3FC"/>
+                </a:solidFill>
+                <a:latin typeface="Montserrat"/>
+              </a:rPr>
+              <a:t>)</a:t>
+            </a:r>
+            <a:endParaRPr sz="1050" b="1" i="0" u="none" dirty="0">
+              <a:solidFill>
+                <a:srgbClr val="A5F3FC"/>
+              </a:solidFill>
+              <a:latin typeface="Montserrat"/>
+            </a:endParaRPr>
+          </a:p>
+        </p:txBody>
+      </p:sp>
+      <p:pic>
+        <p:nvPicPr>
+          <p:cNvPr id="35" name="Picture 9"/>
+          <p:cNvPicPr/>
+          <p:nvPr/>
+        </p:nvPicPr>
+        <p:blipFill>
+          <a:blip r:embed="rId2"/>
+          <a:stretch/>
+        </p:blipFill>
+        <p:spPr>
+          <a:xfrm>
+            <a:off x="9716240" y="125002"/>
+            <a:ext cx="461819" cy="391625"/>
+          </a:xfrm>
+          <a:prstGeom prst="rect">
+            <a:avLst/>
+          </a:prstGeom>
+          <a:ln w="0">
+            <a:noFill/>
+          </a:ln>
+        </p:spPr>
+      </p:pic>
+      <p:sp>
+        <p:nvSpPr>
+          <p:cNvPr id="36" name="TextBox 35"/>
+          <p:cNvSpPr txBox="1"/>
+          <p:nvPr/>
+        </p:nvSpPr>
+        <p:spPr>
+          <a:xfrm>
+            <a:off x="502920" y="900000"/>
+            <a:ext cx="11100000" cy="620000"/>
+          </a:xfrm>
+          <a:prstGeom prst="rect">
+            <a:avLst/>
+          </a:prstGeom>
+          <a:noFill/>
+        </p:spPr>
+        <p:txBody>
+          <a:bodyPr wrap="square" anchor="t"/>
+          <a:lstStyle/>
+          <a:p>
+            <a:pPr algn="l">
+              <a:lnSpc>
+                <a:spcPts val="2200"/>
+              </a:lnSpc>
+              <a:spcBef>
+                <a:spcPts val="0"/>
+              </a:spcBef>
+              <a:spcAft>
+                <a:spcPts val="600"/>
+              </a:spcAft>
+            </a:pPr>
+            <a:r>
+              <a:rPr sz="1700" b="0" i="0">
+                <a:solidFill>
+                  <a:srgbClr val="1E293B"/>
                 </a:solidFill>
                 <a:latin typeface="Open Sans"/>
                 <a:ea typeface="Open Sans"/>
                 <a:cs typeface="Open Sans"/>
               </a:rPr>
-              <a:t>•  </a:t>
-            </a:r>
-            <a:r>
-              <a:rPr sz="1800" b="0" i="0">
-                <a:solidFill>
-                  <a:srgbClr val="1E293B"/>
+              <a:t>Conhecimento de ferramentas de detecção. A comparação é feminino × masculino (n = 69); não binário tem 2 pessoas.</a:t>
+            </a:r>
+          </a:p>
+        </p:txBody>
+      </p:sp>
+      <p:graphicFrame>
+        <p:nvGraphicFramePr>
+          <p:cNvPr id="37" name="Chart 36"/>
+          <p:cNvGraphicFramePr>
+            <a:graphicFrameLocks noGrp="1"/>
+          </p:cNvGraphicFramePr>
+          <p:nvPr/>
+        </p:nvGraphicFramePr>
+        <p:xfrm>
+          <a:off x="400000" y="1500000"/>
+          <a:ext cx="5600000" cy="3800000"/>
+        </p:xfrm>
+        <a:graphic>
+          <a:graphicData uri="http://schemas.openxmlformats.org/drawingml/2006/chart">
+            <c:chart xmlns:c="http://schemas.openxmlformats.org/drawingml/2006/chart" r:id="rId3"/>
+          </a:graphicData>
+        </a:graphic>
+      </p:graphicFrame>
+      <p:graphicFrame>
+        <p:nvGraphicFramePr>
+          <p:cNvPr id="38" name="Chart 37"/>
+          <p:cNvGraphicFramePr>
+            <a:graphicFrameLocks noGrp="1"/>
+          </p:cNvGraphicFramePr>
+          <p:nvPr/>
+        </p:nvGraphicFramePr>
+        <p:xfrm>
+          <a:off x="6100000" y="1500000"/>
+          <a:ext cx="5700000" cy="3800000"/>
+        </p:xfrm>
+        <a:graphic>
+          <a:graphicData uri="http://schemas.openxmlformats.org/drawingml/2006/chart">
+            <c:chart xmlns:c="http://schemas.openxmlformats.org/drawingml/2006/chart" r:id="rId4"/>
+          </a:graphicData>
+        </a:graphic>
+      </p:graphicFrame>
+      <p:sp>
+        <p:nvSpPr>
+          <p:cNvPr id="39" name="TextBox 38"/>
+          <p:cNvSpPr txBox="1"/>
+          <p:nvPr/>
+        </p:nvSpPr>
+        <p:spPr>
+          <a:xfrm>
+            <a:off x="502920" y="5400000"/>
+            <a:ext cx="11100000" cy="900000"/>
+          </a:xfrm>
+          <a:prstGeom prst="rect">
+            <a:avLst/>
+          </a:prstGeom>
+          <a:noFill/>
+        </p:spPr>
+        <p:txBody>
+          <a:bodyPr wrap="square" anchor="t"/>
+          <a:lstStyle/>
+          <a:p>
+            <a:pPr algn="l">
+              <a:lnSpc>
+                <a:spcPts val="1800"/>
+              </a:lnSpc>
+              <a:spcBef>
+                <a:spcPts val="400"/>
+              </a:spcBef>
+              <a:spcAft>
+                <a:spcPts val="200"/>
+              </a:spcAft>
+            </a:pPr>
+            <a:r>
+              <a:rPr sz="1400" b="0" i="0">
+                <a:solidFill>
+                  <a:srgbClr val="475569"/>
                 </a:solidFill>
                 <a:latin typeface="Open Sans"/>
                 <a:ea typeface="Open Sans"/>
                 <a:cs typeface="Open Sans"/>
               </a:rPr>
-              <a:t>Familiaridade alta e capacidade de defesa baixa.</a:t>
-            </a:r>
-          </a:p>
-          <a:p>
-            <a:pPr algn="l">
-              <a:lnSpc>
-                <a:spcPts val="2300"/>
-              </a:lnSpc>
-              <a:spcBef>
-                <a:spcPts val="100"/>
-              </a:spcBef>
-              <a:spcAft>
-                <a:spcPts val="400"/>
-              </a:spcAft>
-            </a:pPr>
-            <a:r>
-              <a:rPr sz="1800" b="1" i="0">
-                <a:solidFill>
-                  <a:srgbClr val="016F89"/>
-                </a:solidFill>
-                <a:latin typeface="Open Sans"/>
-                <a:ea typeface="Open Sans"/>
-                <a:cs typeface="Open Sans"/>
-              </a:rPr>
-              <a:t>•  </a:t>
-            </a:r>
-            <a:r>
-              <a:rPr sz="1800" b="0" i="0">
-                <a:solidFill>
-                  <a:srgbClr val="1E293B"/>
-                </a:solidFill>
-                <a:latin typeface="Open Sans"/>
-                <a:ea typeface="Open Sans"/>
-                <a:cs typeface="Open Sans"/>
-              </a:rPr>
-              <a:t>A exposição já chega a 40,8% da amostra, e a reação mais comum é o silêncio.</a:t>
-            </a:r>
-          </a:p>
-          <a:p>
-            <a:pPr algn="l">
-              <a:lnSpc>
-                <a:spcPts val="2300"/>
-              </a:lnSpc>
-              <a:spcBef>
-                <a:spcPts val="100"/>
-              </a:spcBef>
-              <a:spcAft>
-                <a:spcPts val="400"/>
-              </a:spcAft>
-            </a:pPr>
-            <a:r>
-              <a:rPr sz="1800" b="1" i="0">
-                <a:solidFill>
-                  <a:srgbClr val="016F89"/>
-                </a:solidFill>
-                <a:latin typeface="Open Sans"/>
-                <a:ea typeface="Open Sans"/>
-                <a:cs typeface="Open Sans"/>
-              </a:rPr>
-              <a:t>•  </a:t>
-            </a:r>
-            <a:r>
-              <a:rPr sz="1800" b="0" i="0">
-                <a:solidFill>
-                  <a:srgbClr val="1E293B"/>
-                </a:solidFill>
-                <a:latin typeface="Open Sans"/>
-                <a:ea typeface="Open Sans"/>
-                <a:cs typeface="Open Sans"/>
-              </a:rPr>
-              <a:t>O enfrentamento apontado é o letramento digital na educação básica.</a:t>
-            </a:r>
-          </a:p>
-          <a:p>
-            <a:pPr algn="l">
-              <a:lnSpc>
-                <a:spcPts val="2100"/>
-              </a:lnSpc>
-              <a:spcBef>
-                <a:spcPts val="600"/>
-              </a:spcBef>
-              <a:spcAft>
-                <a:spcPts val="400"/>
-              </a:spcAft>
-            </a:pPr>
-            <a:r>
-              <a:rPr sz="1600" b="0" i="0">
-                <a:solidFill>
-                  <a:srgbClr val="475569"/>
-                </a:solidFill>
-                <a:latin typeface="Open Sans"/>
-                <a:ea typeface="Open Sans"/>
-                <a:cs typeface="Open Sans"/>
-              </a:rPr>
-              <a:t>Próximo passo do relatório: ampliar a amostra e testar ações de letramento com o público infantojuvenil.</a:t>
+              <a:t>Fisher p = 0,054: cerca de 3,3 vezes mais chance de os homens conhecerem a ferramenta. No limite da significância. Escolaridade, renda e idade não explicaram esse conhecimento.</a:t>
             </a:r>
           </a:p>
         </p:txBody>
